--- a/lessons/lesson-16/slides.pptx
+++ b/lessons/lesson-16/slides.pptx
@@ -2,32 +2,32 @@
 <file path=ppt/presentation.xml><?xml version="1.0" encoding="utf-8"?>
 <p:presentation xmlns:p="http://schemas.openxmlformats.org/presentationml/2006/main">
   <p:sldMasterIdLst>
-    <p:sldMasterId xmlns:r="http://schemas.openxmlformats.org/officeDocument/2006/relationships" id="2147483648" r:id="Rd6c1876fffe94eab"/>
+    <p:sldMasterId xmlns:r="http://schemas.openxmlformats.org/officeDocument/2006/relationships" id="2147483648" r:id="Rdc0965df81c949e8"/>
   </p:sldMasterIdLst>
   <p:notesMasterIdLst>
-    <p:notesMasterId xmlns:r="http://schemas.openxmlformats.org/officeDocument/2006/relationships" r:id="R2f64613b190f4df7"/>
+    <p:notesMasterId xmlns:r="http://schemas.openxmlformats.org/officeDocument/2006/relationships" r:id="R3cc09c38781f43cc"/>
   </p:notesMasterIdLst>
   <p:sldIdLst>
-    <p:sldId xmlns:r="http://schemas.openxmlformats.org/officeDocument/2006/relationships" id="256" r:id="R821cf26cc7364aae"/>
-    <p:sldId xmlns:r="http://schemas.openxmlformats.org/officeDocument/2006/relationships" id="257" r:id="R12a00ad632ca4863"/>
-    <p:sldId xmlns:r="http://schemas.openxmlformats.org/officeDocument/2006/relationships" id="258" r:id="Rc2c3c44adc5f4270"/>
-    <p:sldId xmlns:r="http://schemas.openxmlformats.org/officeDocument/2006/relationships" id="259" r:id="R872387e122b64ac5"/>
-    <p:sldId xmlns:r="http://schemas.openxmlformats.org/officeDocument/2006/relationships" id="260" r:id="R7ef03baba19144e7"/>
-    <p:sldId xmlns:r="http://schemas.openxmlformats.org/officeDocument/2006/relationships" id="261" r:id="R8049516e478446a6"/>
-    <p:sldId xmlns:r="http://schemas.openxmlformats.org/officeDocument/2006/relationships" id="262" r:id="R4f65483bf8e64c0c"/>
-    <p:sldId xmlns:r="http://schemas.openxmlformats.org/officeDocument/2006/relationships" id="263" r:id="R6feeb7bef1934b9c"/>
-    <p:sldId xmlns:r="http://schemas.openxmlformats.org/officeDocument/2006/relationships" id="264" r:id="Raf5183c3eb454d80"/>
-    <p:sldId xmlns:r="http://schemas.openxmlformats.org/officeDocument/2006/relationships" id="265" r:id="R5cc08d3ac25f48e7"/>
-    <p:sldId xmlns:r="http://schemas.openxmlformats.org/officeDocument/2006/relationships" id="266" r:id="Re51b9a343f804deb"/>
-    <p:sldId xmlns:r="http://schemas.openxmlformats.org/officeDocument/2006/relationships" id="267" r:id="R1f382661891b430c"/>
-    <p:sldId xmlns:r="http://schemas.openxmlformats.org/officeDocument/2006/relationships" id="268" r:id="R7bf33d0169884100"/>
-    <p:sldId xmlns:r="http://schemas.openxmlformats.org/officeDocument/2006/relationships" id="269" r:id="R86f5173caf124e72"/>
-    <p:sldId xmlns:r="http://schemas.openxmlformats.org/officeDocument/2006/relationships" id="270" r:id="R327172db26e54732"/>
-    <p:sldId xmlns:r="http://schemas.openxmlformats.org/officeDocument/2006/relationships" id="271" r:id="Rd7a6a4f76dd540a7"/>
-    <p:sldId xmlns:r="http://schemas.openxmlformats.org/officeDocument/2006/relationships" id="272" r:id="R29dfa2ae8322480d"/>
-    <p:sldId xmlns:r="http://schemas.openxmlformats.org/officeDocument/2006/relationships" id="273" r:id="R2ecb1e9cd8be444e"/>
-    <p:sldId xmlns:r="http://schemas.openxmlformats.org/officeDocument/2006/relationships" id="274" r:id="R1e53f86d43164d97"/>
-    <p:sldId xmlns:r="http://schemas.openxmlformats.org/officeDocument/2006/relationships" id="275" r:id="R132d32c0a9f44fe3"/>
+    <p:sldId xmlns:r="http://schemas.openxmlformats.org/officeDocument/2006/relationships" id="256" r:id="R83703425be644445"/>
+    <p:sldId xmlns:r="http://schemas.openxmlformats.org/officeDocument/2006/relationships" id="257" r:id="R891abea688524bd6"/>
+    <p:sldId xmlns:r="http://schemas.openxmlformats.org/officeDocument/2006/relationships" id="258" r:id="R39885ba4a8b7452a"/>
+    <p:sldId xmlns:r="http://schemas.openxmlformats.org/officeDocument/2006/relationships" id="259" r:id="R94b2ab7fbc8a4fc8"/>
+    <p:sldId xmlns:r="http://schemas.openxmlformats.org/officeDocument/2006/relationships" id="260" r:id="R1749cb5ba9414e20"/>
+    <p:sldId xmlns:r="http://schemas.openxmlformats.org/officeDocument/2006/relationships" id="261" r:id="R75f647b153d44851"/>
+    <p:sldId xmlns:r="http://schemas.openxmlformats.org/officeDocument/2006/relationships" id="262" r:id="Re0f89067fb1345f4"/>
+    <p:sldId xmlns:r="http://schemas.openxmlformats.org/officeDocument/2006/relationships" id="263" r:id="R1bf53443a70d4900"/>
+    <p:sldId xmlns:r="http://schemas.openxmlformats.org/officeDocument/2006/relationships" id="264" r:id="Rcaae7c888f3a41db"/>
+    <p:sldId xmlns:r="http://schemas.openxmlformats.org/officeDocument/2006/relationships" id="265" r:id="R980b875a66aa4e72"/>
+    <p:sldId xmlns:r="http://schemas.openxmlformats.org/officeDocument/2006/relationships" id="266" r:id="R4663dad3674d45f8"/>
+    <p:sldId xmlns:r="http://schemas.openxmlformats.org/officeDocument/2006/relationships" id="267" r:id="R553b9651ce194192"/>
+    <p:sldId xmlns:r="http://schemas.openxmlformats.org/officeDocument/2006/relationships" id="268" r:id="R367b43f646364737"/>
+    <p:sldId xmlns:r="http://schemas.openxmlformats.org/officeDocument/2006/relationships" id="269" r:id="R17689e2ade24408f"/>
+    <p:sldId xmlns:r="http://schemas.openxmlformats.org/officeDocument/2006/relationships" id="270" r:id="R9bd5231d2ef84528"/>
+    <p:sldId xmlns:r="http://schemas.openxmlformats.org/officeDocument/2006/relationships" id="271" r:id="Rce08b1ed6aab4654"/>
+    <p:sldId xmlns:r="http://schemas.openxmlformats.org/officeDocument/2006/relationships" id="272" r:id="Raeb9876e33294a05"/>
+    <p:sldId xmlns:r="http://schemas.openxmlformats.org/officeDocument/2006/relationships" id="273" r:id="R53176c9058444bb7"/>
+    <p:sldId xmlns:r="http://schemas.openxmlformats.org/officeDocument/2006/relationships" id="274" r:id="R7c478d5327414d0f"/>
+    <p:sldId xmlns:r="http://schemas.openxmlformats.org/officeDocument/2006/relationships" id="275" r:id="R0de0c1389bc7414b"/>
   </p:sldIdLst>
   <p:sldSz cx="12192000" cy="6858000"/>
   <p:notesSz cx="6858000" cy="9144000"/>
@@ -407,7 +407,7 @@
           <a:lstStyle xmlns:a="http://schemas.openxmlformats.org/drawingml/2006/main"/>
           <a:p xmlns:a="http://schemas.openxmlformats.org/drawingml/2006/main">
             <a:r>
-              <a:t>开场回到第 1 课：AI 可以改变研究动作，但研究责任仍由人承担。本课不另造汇报文档，只检查当前个人项目版本。</a:t>
+              <a:t>本讲聚焦“最终分享、论证门与项目提交”。封面只保留正式课名，课堂问题从下一页展开。</a:t>
             </a:r>
           </a:p>
           <a:p xmlns:a="http://schemas.openxmlformats.org/drawingml/2006/main">
@@ -422,17 +422,12 @@
           </a:p>
           <a:p xmlns:a="http://schemas.openxmlformats.org/drawingml/2006/main">
             <a:r>
-              <a:t>- /Users/bright/Projects/courses/graduate/lessons/lesson-16/handout.md</a:t>
-            </a:r>
-          </a:p>
-          <a:p xmlns:a="http://schemas.openxmlformats.org/drawingml/2006/main">
-            <a:r>
-              <a:t>- /Users/bright/Projects/courses/graduate/lessons/备课规划.md</a:t>
-            </a:r>
-          </a:p>
-          <a:p xmlns:a="http://schemas.openxmlformats.org/drawingml/2006/main">
-            <a:r>
-              <a:t>- /Users/bright/Projects/courses/graduate/course/assignments.md</a:t>
+              <a:t>- /Users/bright/Projects/courses/graduate/course/syllabus.md</a:t>
+            </a:r>
+          </a:p>
+          <a:p xmlns:a="http://schemas.openxmlformats.org/drawingml/2006/main">
+            <a:r>
+              <a:t>- /Users/bright/Projects/courses/graduate/lessons/lesson-16/slides.md</a:t>
             </a:r>
           </a:p>
           <a:p xmlns:a="http://schemas.openxmlformats.org/drawingml/2006/main">
@@ -1282,7 +1277,7 @@
           <a:lstStyle xmlns:a="http://schemas.openxmlformats.org/drawingml/2006/main"/>
           <a:p xmlns:a="http://schemas.openxmlformats.org/drawingml/2006/main">
             <a:r>
-              <a:t>这是对第 1 课‘研究责任仍由人承担’的最终回应。AI 可以帮助动作，但不能承担九类研究判断。</a:t>
+              <a:t>回收本讲核心概念及其关系。本页不新增任务；请学生用边界句检查自己的项目工件。</a:t>
             </a:r>
           </a:p>
           <a:p xmlns:a="http://schemas.openxmlformats.org/drawingml/2006/main">
@@ -1297,12 +1292,17 @@
           </a:p>
           <a:p xmlns:a="http://schemas.openxmlformats.org/drawingml/2006/main">
             <a:r>
+              <a:t>- /Users/bright/Projects/courses/graduate/course/syllabus.md</a:t>
+            </a:r>
+          </a:p>
+          <a:p xmlns:a="http://schemas.openxmlformats.org/drawingml/2006/main">
+            <a:r>
               <a:t>- /Users/bright/Projects/courses/graduate/lessons/lesson-16/handout.md</a:t>
             </a:r>
           </a:p>
           <a:p xmlns:a="http://schemas.openxmlformats.org/drawingml/2006/main">
             <a:r>
-              <a:t>- /Users/bright/Projects/courses/graduate/course/syllabus.md</a:t>
+              <a:t>- /Users/bright/Projects/courses/graduate/lessons/lesson-16/slides.md</a:t>
             </a:r>
           </a:p>
           <a:p xmlns:a="http://schemas.openxmlformats.org/drawingml/2006/main">
@@ -2323,7 +2323,7 @@
           <p:nvPr/>
         </p:nvPicPr>
         <p:blipFill>
-          <a:blip xmlns:r="http://schemas.openxmlformats.org/officeDocument/2006/relationships" xmlns:a="http://schemas.openxmlformats.org/drawingml/2006/main" r:embed="R111de3c1bd4f464b">
+          <a:blip xmlns:r="http://schemas.openxmlformats.org/officeDocument/2006/relationships" xmlns:a="http://schemas.openxmlformats.org/drawingml/2006/main" r:embed="Rc52c352bb52544bc">
             <a:duotone>
               <a:prstClr val="black"/>
               <a:schemeClr val="accent1">
@@ -2501,7 +2501,7 @@
           <p:nvPr/>
         </p:nvPicPr>
         <p:blipFill rotWithShape="1">
-          <a:blip xmlns:r="http://schemas.openxmlformats.org/officeDocument/2006/relationships" xmlns:a="http://schemas.openxmlformats.org/drawingml/2006/main" r:embed="R709efea8a7ff4e13"/>
+          <a:blip xmlns:r="http://schemas.openxmlformats.org/officeDocument/2006/relationships" xmlns:a="http://schemas.openxmlformats.org/drawingml/2006/main" r:embed="R43871dce2f5e404f"/>
           <a:srcRect xmlns:a="http://schemas.openxmlformats.org/drawingml/2006/main" l="74359" t="0" r="1346" b="0"/>
           <a:stretch xmlns:a="http://schemas.openxmlformats.org/drawingml/2006/main"/>
         </p:blipFill>
@@ -2524,7 +2524,7 @@
           <p:nvPr/>
         </p:nvPicPr>
         <p:blipFill rotWithShape="1">
-          <a:blip xmlns:r="http://schemas.openxmlformats.org/officeDocument/2006/relationships" xmlns:a="http://schemas.openxmlformats.org/drawingml/2006/main" r:embed="Rfd50a0c80e13419d">
+          <a:blip xmlns:r="http://schemas.openxmlformats.org/officeDocument/2006/relationships" xmlns:a="http://schemas.openxmlformats.org/drawingml/2006/main" r:embed="Rc665ed156e2c4c5b">
             <a:alphaModFix amt="35000"/>
           </a:blip>
           <a:srcRect xmlns:a="http://schemas.openxmlformats.org/drawingml/2006/main" l="0" t="9831" r="0" b="36385"/>
@@ -2786,7 +2786,7 @@
           <p:nvPr/>
         </p:nvPicPr>
         <p:blipFill>
-          <a:blip xmlns:r="http://schemas.openxmlformats.org/officeDocument/2006/relationships" xmlns:a="http://schemas.openxmlformats.org/drawingml/2006/main" r:embed="R969c27d8d541416d"/>
+          <a:blip xmlns:r="http://schemas.openxmlformats.org/officeDocument/2006/relationships" xmlns:a="http://schemas.openxmlformats.org/drawingml/2006/main" r:embed="R677861eeba1644b7"/>
           <a:srcRect xmlns:a="http://schemas.openxmlformats.org/drawingml/2006/main" l="0" t="0" r="54251" b="0"/>
           <a:stretch xmlns:a="http://schemas.openxmlformats.org/drawingml/2006/main"/>
         </p:blipFill>
@@ -3043,7 +3043,7 @@
           <p:nvPr/>
         </p:nvPicPr>
         <p:blipFill rotWithShape="1">
-          <a:blip xmlns:r="http://schemas.openxmlformats.org/officeDocument/2006/relationships" xmlns:a="http://schemas.openxmlformats.org/drawingml/2006/main" r:embed="R32bc769339fe467f"/>
+          <a:blip xmlns:r="http://schemas.openxmlformats.org/officeDocument/2006/relationships" xmlns:a="http://schemas.openxmlformats.org/drawingml/2006/main" r:embed="Rea2670abaf954aa2"/>
           <a:srcRect xmlns:a="http://schemas.openxmlformats.org/drawingml/2006/main" l="0" t="0" r="1346" b="0"/>
           <a:stretch xmlns:a="http://schemas.openxmlformats.org/drawingml/2006/main"/>
         </p:blipFill>
@@ -3226,7 +3226,7 @@
           <p:nvPr/>
         </p:nvPicPr>
         <p:blipFill>
-          <a:blip xmlns:r="http://schemas.openxmlformats.org/officeDocument/2006/relationships" xmlns:a="http://schemas.openxmlformats.org/drawingml/2006/main" r:embed="Rfb1e26927b0c4430"/>
+          <a:blip xmlns:r="http://schemas.openxmlformats.org/officeDocument/2006/relationships" xmlns:a="http://schemas.openxmlformats.org/drawingml/2006/main" r:embed="Rd02407f0fec448ac"/>
           <a:stretch xmlns:a="http://schemas.openxmlformats.org/drawingml/2006/main">
             <a:fillRect l="0" t="0" r="0" b="0"/>
           </a:stretch>
@@ -3322,7 +3322,7 @@
           <p:nvPr/>
         </p:nvPicPr>
         <p:blipFill>
-          <a:blip xmlns:r="http://schemas.openxmlformats.org/officeDocument/2006/relationships" xmlns:a="http://schemas.openxmlformats.org/drawingml/2006/main" r:embed="R0184883b290f473e">
+          <a:blip xmlns:r="http://schemas.openxmlformats.org/officeDocument/2006/relationships" xmlns:a="http://schemas.openxmlformats.org/drawingml/2006/main" r:embed="R6212434a469f49ed">
             <a:duotone>
               <a:prstClr val="black"/>
               <a:schemeClr val="accent1">
@@ -3489,7 +3489,7 @@
           <p:nvPr/>
         </p:nvPicPr>
         <p:blipFill rotWithShape="1">
-          <a:blip xmlns:r="http://schemas.openxmlformats.org/officeDocument/2006/relationships" xmlns:a="http://schemas.openxmlformats.org/drawingml/2006/main" r:embed="R91abc6264a6b4513">
+          <a:blip xmlns:r="http://schemas.openxmlformats.org/officeDocument/2006/relationships" xmlns:a="http://schemas.openxmlformats.org/drawingml/2006/main" r:embed="Rc4c828f7c566468c">
             <a:alphaModFix amt="20000"/>
             <a:duotone>
               <a:schemeClr val="accent4">
@@ -3587,10 +3587,10 @@
   </p:cSld>
   <p:clrMap bg1="lt1" tx1="dk1" bg2="lt2" tx2="dk2" accent1="accent1" accent2="accent2" accent3="accent3" accent4="accent4" accent5="accent5" accent6="accent6" hlink="hlink" folHlink="folHlink"/>
   <p:sldLayoutIdLst>
-    <p:sldLayoutId xmlns:r="http://schemas.openxmlformats.org/officeDocument/2006/relationships" id="2147483649" r:id="R524da8d29e064e03"/>
-    <p:sldLayoutId xmlns:r="http://schemas.openxmlformats.org/officeDocument/2006/relationships" id="2147483650" r:id="R394e822a73ba4599"/>
-    <p:sldLayoutId xmlns:r="http://schemas.openxmlformats.org/officeDocument/2006/relationships" id="2147483651" r:id="R5389ccd530044b0b"/>
-    <p:sldLayoutId xmlns:r="http://schemas.openxmlformats.org/officeDocument/2006/relationships" id="2147483652" r:id="Rc287331d0e0a4b97"/>
+    <p:sldLayoutId xmlns:r="http://schemas.openxmlformats.org/officeDocument/2006/relationships" id="2147483649" r:id="R8ae85bc8ed714c33"/>
+    <p:sldLayoutId xmlns:r="http://schemas.openxmlformats.org/officeDocument/2006/relationships" id="2147483650" r:id="Rdbc72cffa4564d8a"/>
+    <p:sldLayoutId xmlns:r="http://schemas.openxmlformats.org/officeDocument/2006/relationships" id="2147483651" r:id="Rb6bb0a4f5bd74023"/>
+    <p:sldLayoutId xmlns:r="http://schemas.openxmlformats.org/officeDocument/2006/relationships" id="2147483652" r:id="Re831c7c3fa8f4eba"/>
   </p:sldLayoutIdLst>
   <p:hf hdr="0" ftr="0" dt="0"/>
   <p:txStyles>
@@ -4123,120 +4123,6 @@
       </p:grpSpPr>
       <p:sp>
         <p:nvSpPr>
-          <p:cNvPr id="3" name="内容占位符 2">
-            <a:extLst xmlns:a="http://schemas.openxmlformats.org/drawingml/2006/main">
-              <a:ext uri="{FF2B5EF4-FFF2-40B4-BE49-F238E27FC236}">
-                <a16:creationId xmlns:a16="http://schemas.microsoft.com/office/drawing/2014/main" id="{D1D30E0E-D2D5-4C08-A919-2A1C2D5A8D02}"/>
-              </a:ext>
-            </a:extLst>
-          </p:cNvPr>
-          <p:cNvSpPr>
-            <a:spLocks xmlns:a="http://schemas.openxmlformats.org/drawingml/2006/main" noGrp="1"/>
-          </p:cNvSpPr>
-          <p:nvPr>
-            <p:ph idx="10"/>
-          </p:nvPr>
-        </p:nvSpPr>
-        <p:spPr>
-          <a:xfrm xmlns:a="http://schemas.openxmlformats.org/drawingml/2006/main">
-            <a:off x="1238250" y="3048000"/>
-            <a:ext cx="9715500" cy="2343150"/>
-          </a:xfrm>
-        </p:spPr>
-        <p:txBody>
-          <a:bodyPr xmlns:a="http://schemas.openxmlformats.org/drawingml/2006/main" lIns="0" tIns="0" rIns="0" bIns="0" anchor="ctr"/>
-          <a:lstStyle xmlns:a="http://schemas.openxmlformats.org/drawingml/2006/main"/>
-          <a:p xmlns:a="http://schemas.openxmlformats.org/drawingml/2006/main">
-            <a:pPr algn="ctr">
-              <a:lnSpc>
-                <a:spcPct val="125000"/>
-              </a:lnSpc>
-              <a:buNone/>
-            </a:pPr>
-            <a:r>
-              <a:rPr sz="1800" b="1">
-                <a:solidFill>
-                  <a:srgbClr val="18354E"/>
-                </a:solidFill>
-                <a:latin typeface="Microsoft YaHei"/>
-                <a:ea typeface="Microsoft YaHei"/>
-                <a:cs typeface="Microsoft YaHei"/>
-              </a:rPr>
-              <a:t>最终分享 → 复现抽查 → 论证门 → 期末项目</a:t>
-            </a:r>
-            <a:endParaRPr>
-              <a:latin typeface="+mn-ea"/>
-              <a:ea typeface="+mn-ea"/>
-              <a:cs typeface="+mn-ea"/>
-            </a:endParaRPr>
-          </a:p>
-          <a:p xmlns:a="http://schemas.openxmlformats.org/drawingml/2006/main">
-            <a:r>
-              <a:rPr>
-                <a:latin typeface="+mn-ea"/>
-                <a:ea typeface="+mn-ea"/>
-                <a:cs typeface="+mn-ea"/>
-              </a:rPr>
-              <a:t/>
-            </a:r>
-            <a:endParaRPr>
-              <a:latin typeface="+mn-ea"/>
-              <a:ea typeface="+mn-ea"/>
-              <a:cs typeface="+mn-ea"/>
-            </a:endParaRPr>
-          </a:p>
-          <a:p xmlns:a="http://schemas.openxmlformats.org/drawingml/2006/main">
-            <a:pPr algn="ctr">
-              <a:lnSpc>
-                <a:spcPct val="125000"/>
-              </a:lnSpc>
-              <a:buNone/>
-            </a:pPr>
-            <a:r>
-              <a:rPr sz="1800" b="1">
-                <a:solidFill>
-                  <a:srgbClr val="18354E"/>
-                </a:solidFill>
-                <a:latin typeface="Microsoft YaHei"/>
-                <a:ea typeface="Microsoft YaHei"/>
-                <a:cs typeface="Microsoft YaHei"/>
-              </a:rPr>
-              <a:t>把整学期工件收口为可追溯、可复核、诚实披露的研究论证</a:t>
-            </a:r>
-            <a:endParaRPr>
-              <a:latin typeface="+mn-ea"/>
-              <a:ea typeface="+mn-ea"/>
-              <a:cs typeface="+mn-ea"/>
-            </a:endParaRPr>
-          </a:p>
-          <a:p xmlns:a="http://schemas.openxmlformats.org/drawingml/2006/main">
-            <a:pPr algn="ctr">
-              <a:lnSpc>
-                <a:spcPct val="125000"/>
-              </a:lnSpc>
-              <a:buNone/>
-            </a:pPr>
-            <a:r>
-              <a:rPr sz="1800" b="1">
-                <a:solidFill>
-                  <a:srgbClr val="18354E"/>
-                </a:solidFill>
-                <a:latin typeface="Microsoft YaHei"/>
-                <a:ea typeface="Microsoft YaHei"/>
-                <a:cs typeface="Microsoft YaHei"/>
-              </a:rPr>
-              <a:t>第十六讲｜阶段八：论证收口 + 个人项目最终提交</a:t>
-            </a:r>
-            <a:endParaRPr>
-              <a:latin typeface="+mn-ea"/>
-              <a:ea typeface="+mn-ea"/>
-              <a:cs typeface="+mn-ea"/>
-            </a:endParaRPr>
-          </a:p>
-        </p:txBody>
-      </p:sp>
-      <p:sp>
-        <p:nvSpPr>
           <p:cNvPr id="2" name="矩形 11">
             <a:extLst xmlns:a="http://schemas.openxmlformats.org/drawingml/2006/main">
               <a:ext uri="{FF2B5EF4-FFF2-40B4-BE49-F238E27FC236}">
@@ -4251,27 +4137,27 @@
         </p:nvSpPr>
         <p:spPr>
           <a:xfrm xmlns:a="http://schemas.openxmlformats.org/drawingml/2006/main">
-            <a:off x="1333500" y="1295400"/>
-            <a:ext cx="9525000" cy="1645920"/>
+            <a:off x="1143000" y="1790700"/>
+            <a:ext cx="9906000" cy="1524000"/>
           </a:xfrm>
           <a:prstGeom xmlns:a="http://schemas.openxmlformats.org/drawingml/2006/main" prst="rect">
             <a:avLst/>
           </a:prstGeom>
         </p:spPr>
         <p:txBody>
-          <a:bodyPr xmlns:a="http://schemas.openxmlformats.org/drawingml/2006/main" lIns="0" tIns="0" rIns="0" bIns="0" anchor="ctr">
+          <a:bodyPr xmlns:a="http://schemas.openxmlformats.org/drawingml/2006/main" lIns="76200" tIns="38100" rIns="76200" bIns="38100" anchor="ctr">
             <a:spAutoFit/>
           </a:bodyPr>
           <a:lstStyle xmlns:a="http://schemas.openxmlformats.org/drawingml/2006/main"/>
           <a:p xmlns:a="http://schemas.openxmlformats.org/drawingml/2006/main">
             <a:pPr algn="ctr">
               <a:lnSpc>
-                <a:spcPct val="150000"/>
+                <a:spcPct val="112000"/>
               </a:lnSpc>
               <a:buNone/>
             </a:pPr>
             <a:r>
-              <a:rPr sz="2925" b="1">
+              <a:rPr sz="3150" b="1">
                 <a:solidFill>
                   <a:srgbClr val="C8161E"/>
                 </a:solidFill>
@@ -4279,7 +4165,7 @@
                 <a:ea typeface="Microsoft YaHei"/>
                 <a:cs typeface="Microsoft YaHei"/>
               </a:rPr>
-              <a:t>学生最终分享、论证门与期末项目</a:t>
+              <a:t>第16讲 最终分享、论证门与项目提交</a:t>
             </a:r>
             <a:endParaRPr sz="4000" b="1" kern="0" spc="20">
               <a:solidFill>
@@ -16363,10 +16249,13 @@
           </a:xfrm>
         </p:spPr>
         <p:txBody>
-          <a:bodyPr xmlns:a="http://schemas.openxmlformats.org/drawingml/2006/main" lIns="76200" tIns="0" rIns="76200" bIns="0" anchor="ctr"/>
+          <a:bodyPr xmlns:a="http://schemas.openxmlformats.org/drawingml/2006/main" lIns="76200" tIns="38100" rIns="76200" bIns="38100" anchor="ctr"/>
           <a:lstStyle xmlns:a="http://schemas.openxmlformats.org/drawingml/2006/main"/>
           <a:p xmlns:a="http://schemas.openxmlformats.org/drawingml/2006/main">
             <a:pPr algn="l">
+              <a:lnSpc>
+                <a:spcPct val="112000"/>
+              </a:lnSpc>
               <a:buNone/>
             </a:pPr>
             <a:r>
@@ -16378,7 +16267,7 @@
                 <a:ea typeface="Microsoft YaHei"/>
                 <a:cs typeface="Microsoft YaHei"/>
               </a:rPr>
-              <a:t>AI 可加速研究动作，但九类判断不能自动外包</a:t>
+              <a:t>本讲知识点总结</a:t>
             </a:r>
             <a:endParaRPr/>
           </a:p>
@@ -16414,95 +16303,44 @@
       </p:sp>
       <p:sp>
         <p:nvSpPr>
-          <p:cNvPr id="6" name="p13-errors-title">
-            <a:extLst xmlns:a="http://schemas.openxmlformats.org/drawingml/2006/main">
-              <a:ext uri="{FF2B5EF4-FFF2-40B4-BE49-F238E27FC236}">
-                <a16:creationId xmlns:a16="http://schemas.microsoft.com/office/drawing/2014/main" id="{EE4C7D34-B53E-44E5-9C18-87AFFF47C5DF}"/>
-              </a:ext>
-            </a:extLst>
-          </p:cNvPr>
-          <p:cNvSpPr>
-            <a:spLocks xmlns:a="http://schemas.openxmlformats.org/drawingml/2006/main" noGrp="1"/>
-          </p:cNvSpPr>
-          <p:nvPr/>
-        </p:nvSpPr>
-        <p:spPr>
-          <a:xfrm xmlns:a="http://schemas.openxmlformats.org/drawingml/2006/main">
-            <a:off x="685800" y="990600"/>
-            <a:ext cx="6477000" cy="438150"/>
-          </a:xfrm>
-          <a:prstGeom xmlns:a="http://schemas.openxmlformats.org/drawingml/2006/main" prst="rect">
-            <a:avLst/>
-          </a:prstGeom>
-          <a:noFill xmlns:a="http://schemas.openxmlformats.org/drawingml/2006/main"/>
-          <a:ln xmlns:a="http://schemas.openxmlformats.org/drawingml/2006/main" w="0">
-            <a:noFill/>
-            <a:prstDash val="solid"/>
-          </a:ln>
-        </p:spPr>
-        <p:txBody>
-          <a:bodyPr xmlns:a="http://schemas.openxmlformats.org/drawingml/2006/main" lIns="76200" tIns="38100" rIns="76200" bIns="38100" anchor="ctr"/>
-          <a:lstStyle xmlns:a="http://schemas.openxmlformats.org/drawingml/2006/main"/>
-          <a:p xmlns:a="http://schemas.openxmlformats.org/drawingml/2006/main">
-            <a:pPr algn="ctr">
-              <a:buNone/>
-              <a:defRPr sz="1875" b="1">
-                <a:solidFill>
-                  <a:srgbClr val="C8161E"/>
-                </a:solidFill>
-              </a:defRPr>
-            </a:pPr>
-            <a:r>
-              <a:rPr sz="1875" b="1">
-                <a:solidFill>
-                  <a:srgbClr val="C8161E"/>
-                </a:solidFill>
-                <a:latin typeface="Microsoft YaHei"/>
-                <a:ea typeface="Microsoft YaHei"/>
-                <a:cs typeface="Microsoft YaHei"/>
-              </a:rPr>
-              <a:t>仍由研究者负责</a:t>
-            </a:r>
-          </a:p>
-        </p:txBody>
-      </p:sp>
-      <p:sp>
-        <p:nvSpPr>
-          <p:cNvPr id="7" name="p13-x-0">
-            <a:extLst xmlns:a="http://schemas.openxmlformats.org/drawingml/2006/main">
-              <a:ext uri="{FF2B5EF4-FFF2-40B4-BE49-F238E27FC236}">
-                <a16:creationId xmlns:a16="http://schemas.microsoft.com/office/drawing/2014/main" id="{815022BE-CD77-49F0-8F8A-9A719847768F}"/>
-              </a:ext>
-            </a:extLst>
-          </p:cNvPr>
-          <p:cNvSpPr>
-            <a:spLocks xmlns:a="http://schemas.openxmlformats.org/drawingml/2006/main" noGrp="1"/>
-          </p:cNvSpPr>
-          <p:nvPr/>
-        </p:nvSpPr>
-        <p:spPr>
-          <a:xfrm xmlns:a="http://schemas.openxmlformats.org/drawingml/2006/main">
-            <a:off x="723900" y="1562100"/>
-            <a:ext cx="400050" cy="400050"/>
+          <p:cNvPr id="6" name="summary-16-number-0">
+            <a:extLst xmlns:a="http://schemas.openxmlformats.org/drawingml/2006/main">
+              <a:ext uri="{FF2B5EF4-FFF2-40B4-BE49-F238E27FC236}">
+                <a16:creationId xmlns:a16="http://schemas.microsoft.com/office/drawing/2014/main" id="{82B4EC50-AED3-4521-9656-A87124A72322}"/>
+              </a:ext>
+            </a:extLst>
+          </p:cNvPr>
+          <p:cNvSpPr>
+            <a:spLocks xmlns:a="http://schemas.openxmlformats.org/drawingml/2006/main" noGrp="1"/>
+          </p:cNvSpPr>
+          <p:nvPr/>
+        </p:nvSpPr>
+        <p:spPr>
+          <a:xfrm xmlns:a="http://schemas.openxmlformats.org/drawingml/2006/main">
+            <a:off x="457200" y="1219200"/>
+            <a:ext cx="476250" cy="476250"/>
           </a:xfrm>
           <a:prstGeom xmlns:a="http://schemas.openxmlformats.org/drawingml/2006/main" prst="roundRect">
             <a:avLst>
-              <a:gd name="adj" fmla="val 19048"/>
+              <a:gd name="adj" fmla="val 16000"/>
             </a:avLst>
           </a:prstGeom>
           <a:solidFill xmlns:a="http://schemas.openxmlformats.org/drawingml/2006/main">
-            <a:srgbClr val="C8161E"/>
-          </a:solidFill>
-          <a:ln xmlns:a="http://schemas.openxmlformats.org/drawingml/2006/main" w="0">
-            <a:noFill/>
-            <a:prstDash val="solid"/>
-          </a:ln>
-        </p:spPr>
-        <p:txBody>
-          <a:bodyPr xmlns:a="http://schemas.openxmlformats.org/drawingml/2006/main" lIns="76200" tIns="38100" rIns="76200" bIns="38100" anchor="ctr"/>
-          <a:lstStyle xmlns:a="http://schemas.openxmlformats.org/drawingml/2006/main"/>
-          <a:p xmlns:a="http://schemas.openxmlformats.org/drawingml/2006/main">
-            <a:pPr algn="ctr">
+            <a:srgbClr val="18354E"/>
+          </a:solidFill>
+          <a:ln xmlns:a="http://schemas.openxmlformats.org/drawingml/2006/main" w="0">
+            <a:noFill/>
+            <a:prstDash val="solid"/>
+          </a:ln>
+        </p:spPr>
+        <p:txBody>
+          <a:bodyPr xmlns:a="http://schemas.openxmlformats.org/drawingml/2006/main" lIns="76200" tIns="38100" rIns="76200" bIns="38100" anchor="ctr"/>
+          <a:lstStyle xmlns:a="http://schemas.openxmlformats.org/drawingml/2006/main"/>
+          <a:p xmlns:a="http://schemas.openxmlformats.org/drawingml/2006/main">
+            <a:pPr algn="ctr">
+              <a:lnSpc>
+                <a:spcPct val="112000"/>
+              </a:lnSpc>
               <a:buNone/>
               <a:defRPr sz="1500" b="1">
                 <a:solidFill>
@@ -16512,1231 +16350,6 @@
             </a:pPr>
             <a:r>
               <a:rPr sz="1500" b="1">
-                <a:solidFill>
-                  <a:srgbClr val="FFFFFF"/>
-                </a:solidFill>
-                <a:latin typeface="Microsoft YaHei"/>
-                <a:ea typeface="Microsoft YaHei"/>
-                <a:cs typeface="Microsoft YaHei"/>
-              </a:rPr>
-              <a:t>①</a:t>
-            </a:r>
-          </a:p>
-        </p:txBody>
-      </p:sp>
-      <p:sp>
-        <p:nvSpPr>
-          <p:cNvPr id="8" name="p13-error-0">
-            <a:extLst xmlns:a="http://schemas.openxmlformats.org/drawingml/2006/main">
-              <a:ext uri="{FF2B5EF4-FFF2-40B4-BE49-F238E27FC236}">
-                <a16:creationId xmlns:a16="http://schemas.microsoft.com/office/drawing/2014/main" id="{E68E2E25-B499-4768-AAC2-AE89226D257B}"/>
-              </a:ext>
-            </a:extLst>
-          </p:cNvPr>
-          <p:cNvSpPr>
-            <a:spLocks xmlns:a="http://schemas.openxmlformats.org/drawingml/2006/main" noGrp="1"/>
-          </p:cNvSpPr>
-          <p:nvPr/>
-        </p:nvSpPr>
-        <p:spPr>
-          <a:xfrm xmlns:a="http://schemas.openxmlformats.org/drawingml/2006/main">
-            <a:off x="1200150" y="1562100"/>
-            <a:ext cx="2647950" cy="400050"/>
-          </a:xfrm>
-          <a:prstGeom xmlns:a="http://schemas.openxmlformats.org/drawingml/2006/main" prst="rect">
-            <a:avLst/>
-          </a:prstGeom>
-          <a:solidFill xmlns:a="http://schemas.openxmlformats.org/drawingml/2006/main">
-            <a:srgbClr val="F8E9EA"/>
-          </a:solidFill>
-          <a:ln xmlns:a="http://schemas.openxmlformats.org/drawingml/2006/main" w="0">
-            <a:noFill/>
-            <a:prstDash val="solid"/>
-          </a:ln>
-        </p:spPr>
-        <p:txBody>
-          <a:bodyPr xmlns:a="http://schemas.openxmlformats.org/drawingml/2006/main" lIns="76200" tIns="38100" rIns="76200" bIns="38100" anchor="ctr"/>
-          <a:lstStyle xmlns:a="http://schemas.openxmlformats.org/drawingml/2006/main"/>
-          <a:p xmlns:a="http://schemas.openxmlformats.org/drawingml/2006/main">
-            <a:pPr algn="ctr">
-              <a:buNone/>
-              <a:defRPr sz="1350" b="1">
-                <a:solidFill>
-                  <a:srgbClr val="263746"/>
-                </a:solidFill>
-              </a:defRPr>
-            </a:pPr>
-            <a:r>
-              <a:rPr sz="1350" b="1">
-                <a:solidFill>
-                  <a:srgbClr val="263746"/>
-                </a:solidFill>
-                <a:latin typeface="Microsoft YaHei"/>
-                <a:ea typeface="Microsoft YaHei"/>
-                <a:cs typeface="Microsoft YaHei"/>
-              </a:rPr>
-              <a:t>研究问题是否重要</a:t>
-            </a:r>
-          </a:p>
-        </p:txBody>
-      </p:sp>
-      <p:sp>
-        <p:nvSpPr>
-          <p:cNvPr id="9" name="p13-x-1">
-            <a:extLst xmlns:a="http://schemas.openxmlformats.org/drawingml/2006/main">
-              <a:ext uri="{FF2B5EF4-FFF2-40B4-BE49-F238E27FC236}">
-                <a16:creationId xmlns:a16="http://schemas.microsoft.com/office/drawing/2014/main" id="{36CF7543-81E6-4594-95E5-42781D48532B}"/>
-              </a:ext>
-            </a:extLst>
-          </p:cNvPr>
-          <p:cNvSpPr>
-            <a:spLocks xmlns:a="http://schemas.openxmlformats.org/drawingml/2006/main" noGrp="1"/>
-          </p:cNvSpPr>
-          <p:nvPr/>
-        </p:nvSpPr>
-        <p:spPr>
-          <a:xfrm xmlns:a="http://schemas.openxmlformats.org/drawingml/2006/main">
-            <a:off x="4000500" y="1562100"/>
-            <a:ext cx="400050" cy="400050"/>
-          </a:xfrm>
-          <a:prstGeom xmlns:a="http://schemas.openxmlformats.org/drawingml/2006/main" prst="roundRect">
-            <a:avLst>
-              <a:gd name="adj" fmla="val 19048"/>
-            </a:avLst>
-          </a:prstGeom>
-          <a:solidFill xmlns:a="http://schemas.openxmlformats.org/drawingml/2006/main">
-            <a:srgbClr val="C8161E"/>
-          </a:solidFill>
-          <a:ln xmlns:a="http://schemas.openxmlformats.org/drawingml/2006/main" w="0">
-            <a:noFill/>
-            <a:prstDash val="solid"/>
-          </a:ln>
-        </p:spPr>
-        <p:txBody>
-          <a:bodyPr xmlns:a="http://schemas.openxmlformats.org/drawingml/2006/main" lIns="76200" tIns="38100" rIns="76200" bIns="38100" anchor="ctr"/>
-          <a:lstStyle xmlns:a="http://schemas.openxmlformats.org/drawingml/2006/main"/>
-          <a:p xmlns:a="http://schemas.openxmlformats.org/drawingml/2006/main">
-            <a:pPr algn="ctr">
-              <a:buNone/>
-              <a:defRPr sz="1500" b="1">
-                <a:solidFill>
-                  <a:srgbClr val="FFFFFF"/>
-                </a:solidFill>
-              </a:defRPr>
-            </a:pPr>
-            <a:r>
-              <a:rPr sz="1500" b="1">
-                <a:solidFill>
-                  <a:srgbClr val="FFFFFF"/>
-                </a:solidFill>
-                <a:latin typeface="Microsoft YaHei"/>
-                <a:ea typeface="Microsoft YaHei"/>
-                <a:cs typeface="Microsoft YaHei"/>
-              </a:rPr>
-              <a:t>②</a:t>
-            </a:r>
-          </a:p>
-        </p:txBody>
-      </p:sp>
-      <p:sp>
-        <p:nvSpPr>
-          <p:cNvPr id="10" name="p13-error-1">
-            <a:extLst xmlns:a="http://schemas.openxmlformats.org/drawingml/2006/main">
-              <a:ext uri="{FF2B5EF4-FFF2-40B4-BE49-F238E27FC236}">
-                <a16:creationId xmlns:a16="http://schemas.microsoft.com/office/drawing/2014/main" id="{00E01453-4F0A-4CA8-A0A8-E3BBC365E658}"/>
-              </a:ext>
-            </a:extLst>
-          </p:cNvPr>
-          <p:cNvSpPr>
-            <a:spLocks xmlns:a="http://schemas.openxmlformats.org/drawingml/2006/main" noGrp="1"/>
-          </p:cNvSpPr>
-          <p:nvPr/>
-        </p:nvSpPr>
-        <p:spPr>
-          <a:xfrm xmlns:a="http://schemas.openxmlformats.org/drawingml/2006/main">
-            <a:off x="4476750" y="1562100"/>
-            <a:ext cx="2647950" cy="400050"/>
-          </a:xfrm>
-          <a:prstGeom xmlns:a="http://schemas.openxmlformats.org/drawingml/2006/main" prst="rect">
-            <a:avLst/>
-          </a:prstGeom>
-          <a:solidFill xmlns:a="http://schemas.openxmlformats.org/drawingml/2006/main">
-            <a:srgbClr val="F8E9EA"/>
-          </a:solidFill>
-          <a:ln xmlns:a="http://schemas.openxmlformats.org/drawingml/2006/main" w="0">
-            <a:noFill/>
-            <a:prstDash val="solid"/>
-          </a:ln>
-        </p:spPr>
-        <p:txBody>
-          <a:bodyPr xmlns:a="http://schemas.openxmlformats.org/drawingml/2006/main" lIns="76200" tIns="38100" rIns="76200" bIns="38100" anchor="ctr"/>
-          <a:lstStyle xmlns:a="http://schemas.openxmlformats.org/drawingml/2006/main"/>
-          <a:p xmlns:a="http://schemas.openxmlformats.org/drawingml/2006/main">
-            <a:pPr algn="ctr">
-              <a:buNone/>
-              <a:defRPr sz="1350" b="1">
-                <a:solidFill>
-                  <a:srgbClr val="263746"/>
-                </a:solidFill>
-              </a:defRPr>
-            </a:pPr>
-            <a:r>
-              <a:rPr sz="1350" b="1">
-                <a:solidFill>
-                  <a:srgbClr val="263746"/>
-                </a:solidFill>
-                <a:latin typeface="Microsoft YaHei"/>
-                <a:ea typeface="Microsoft YaHei"/>
-                <a:cs typeface="Microsoft YaHei"/>
-              </a:rPr>
-              <a:t>来源是否可信</a:t>
-            </a:r>
-          </a:p>
-        </p:txBody>
-      </p:sp>
-      <p:sp>
-        <p:nvSpPr>
-          <p:cNvPr id="11" name="p13-x-2">
-            <a:extLst xmlns:a="http://schemas.openxmlformats.org/drawingml/2006/main">
-              <a:ext uri="{FF2B5EF4-FFF2-40B4-BE49-F238E27FC236}">
-                <a16:creationId xmlns:a16="http://schemas.microsoft.com/office/drawing/2014/main" id="{129B5344-CC12-4945-A5AF-D842833092F1}"/>
-              </a:ext>
-            </a:extLst>
-          </p:cNvPr>
-          <p:cNvSpPr>
-            <a:spLocks xmlns:a="http://schemas.openxmlformats.org/drawingml/2006/main" noGrp="1"/>
-          </p:cNvSpPr>
-          <p:nvPr/>
-        </p:nvSpPr>
-        <p:spPr>
-          <a:xfrm xmlns:a="http://schemas.openxmlformats.org/drawingml/2006/main">
-            <a:off x="723900" y="2228850"/>
-            <a:ext cx="400050" cy="400050"/>
-          </a:xfrm>
-          <a:prstGeom xmlns:a="http://schemas.openxmlformats.org/drawingml/2006/main" prst="roundRect">
-            <a:avLst>
-              <a:gd name="adj" fmla="val 19048"/>
-            </a:avLst>
-          </a:prstGeom>
-          <a:solidFill xmlns:a="http://schemas.openxmlformats.org/drawingml/2006/main">
-            <a:srgbClr val="C8161E"/>
-          </a:solidFill>
-          <a:ln xmlns:a="http://schemas.openxmlformats.org/drawingml/2006/main" w="0">
-            <a:noFill/>
-            <a:prstDash val="solid"/>
-          </a:ln>
-        </p:spPr>
-        <p:txBody>
-          <a:bodyPr xmlns:a="http://schemas.openxmlformats.org/drawingml/2006/main" lIns="76200" tIns="38100" rIns="76200" bIns="38100" anchor="ctr"/>
-          <a:lstStyle xmlns:a="http://schemas.openxmlformats.org/drawingml/2006/main"/>
-          <a:p xmlns:a="http://schemas.openxmlformats.org/drawingml/2006/main">
-            <a:pPr algn="ctr">
-              <a:buNone/>
-              <a:defRPr sz="1500" b="1">
-                <a:solidFill>
-                  <a:srgbClr val="FFFFFF"/>
-                </a:solidFill>
-              </a:defRPr>
-            </a:pPr>
-            <a:r>
-              <a:rPr sz="1500" b="1">
-                <a:solidFill>
-                  <a:srgbClr val="FFFFFF"/>
-                </a:solidFill>
-                <a:latin typeface="Microsoft YaHei"/>
-                <a:ea typeface="Microsoft YaHei"/>
-                <a:cs typeface="Microsoft YaHei"/>
-              </a:rPr>
-              <a:t>③</a:t>
-            </a:r>
-          </a:p>
-        </p:txBody>
-      </p:sp>
-      <p:sp>
-        <p:nvSpPr>
-          <p:cNvPr id="12" name="p13-error-2">
-            <a:extLst xmlns:a="http://schemas.openxmlformats.org/drawingml/2006/main">
-              <a:ext uri="{FF2B5EF4-FFF2-40B4-BE49-F238E27FC236}">
-                <a16:creationId xmlns:a16="http://schemas.microsoft.com/office/drawing/2014/main" id="{E98E59BD-4560-4AFF-AF3E-3CAFC87919B7}"/>
-              </a:ext>
-            </a:extLst>
-          </p:cNvPr>
-          <p:cNvSpPr>
-            <a:spLocks xmlns:a="http://schemas.openxmlformats.org/drawingml/2006/main" noGrp="1"/>
-          </p:cNvSpPr>
-          <p:nvPr/>
-        </p:nvSpPr>
-        <p:spPr>
-          <a:xfrm xmlns:a="http://schemas.openxmlformats.org/drawingml/2006/main">
-            <a:off x="1200150" y="2228850"/>
-            <a:ext cx="2647950" cy="400050"/>
-          </a:xfrm>
-          <a:prstGeom xmlns:a="http://schemas.openxmlformats.org/drawingml/2006/main" prst="rect">
-            <a:avLst/>
-          </a:prstGeom>
-          <a:solidFill xmlns:a="http://schemas.openxmlformats.org/drawingml/2006/main">
-            <a:srgbClr val="F8E9EA"/>
-          </a:solidFill>
-          <a:ln xmlns:a="http://schemas.openxmlformats.org/drawingml/2006/main" w="0">
-            <a:noFill/>
-            <a:prstDash val="solid"/>
-          </a:ln>
-        </p:spPr>
-        <p:txBody>
-          <a:bodyPr xmlns:a="http://schemas.openxmlformats.org/drawingml/2006/main" lIns="76200" tIns="38100" rIns="76200" bIns="38100" anchor="ctr"/>
-          <a:lstStyle xmlns:a="http://schemas.openxmlformats.org/drawingml/2006/main"/>
-          <a:p xmlns:a="http://schemas.openxmlformats.org/drawingml/2006/main">
-            <a:pPr algn="ctr">
-              <a:buNone/>
-              <a:defRPr sz="1350" b="1">
-                <a:solidFill>
-                  <a:srgbClr val="263746"/>
-                </a:solidFill>
-              </a:defRPr>
-            </a:pPr>
-            <a:r>
-              <a:rPr sz="1350" b="1">
-                <a:solidFill>
-                  <a:srgbClr val="263746"/>
-                </a:solidFill>
-                <a:latin typeface="Microsoft YaHei"/>
-                <a:ea typeface="Microsoft YaHei"/>
-                <a:cs typeface="Microsoft YaHei"/>
-              </a:rPr>
-              <a:t>证据支持到哪里</a:t>
-            </a:r>
-          </a:p>
-        </p:txBody>
-      </p:sp>
-      <p:sp>
-        <p:nvSpPr>
-          <p:cNvPr id="13" name="p13-x-3">
-            <a:extLst xmlns:a="http://schemas.openxmlformats.org/drawingml/2006/main">
-              <a:ext uri="{FF2B5EF4-FFF2-40B4-BE49-F238E27FC236}">
-                <a16:creationId xmlns:a16="http://schemas.microsoft.com/office/drawing/2014/main" id="{B0A3997F-84CB-40B8-A2EC-F631A62E2125}"/>
-              </a:ext>
-            </a:extLst>
-          </p:cNvPr>
-          <p:cNvSpPr>
-            <a:spLocks xmlns:a="http://schemas.openxmlformats.org/drawingml/2006/main" noGrp="1"/>
-          </p:cNvSpPr>
-          <p:nvPr/>
-        </p:nvSpPr>
-        <p:spPr>
-          <a:xfrm xmlns:a="http://schemas.openxmlformats.org/drawingml/2006/main">
-            <a:off x="4000500" y="2228850"/>
-            <a:ext cx="400050" cy="400050"/>
-          </a:xfrm>
-          <a:prstGeom xmlns:a="http://schemas.openxmlformats.org/drawingml/2006/main" prst="roundRect">
-            <a:avLst>
-              <a:gd name="adj" fmla="val 19048"/>
-            </a:avLst>
-          </a:prstGeom>
-          <a:solidFill xmlns:a="http://schemas.openxmlformats.org/drawingml/2006/main">
-            <a:srgbClr val="C8161E"/>
-          </a:solidFill>
-          <a:ln xmlns:a="http://schemas.openxmlformats.org/drawingml/2006/main" w="0">
-            <a:noFill/>
-            <a:prstDash val="solid"/>
-          </a:ln>
-        </p:spPr>
-        <p:txBody>
-          <a:bodyPr xmlns:a="http://schemas.openxmlformats.org/drawingml/2006/main" lIns="76200" tIns="38100" rIns="76200" bIns="38100" anchor="ctr"/>
-          <a:lstStyle xmlns:a="http://schemas.openxmlformats.org/drawingml/2006/main"/>
-          <a:p xmlns:a="http://schemas.openxmlformats.org/drawingml/2006/main">
-            <a:pPr algn="ctr">
-              <a:buNone/>
-              <a:defRPr sz="1500" b="1">
-                <a:solidFill>
-                  <a:srgbClr val="FFFFFF"/>
-                </a:solidFill>
-              </a:defRPr>
-            </a:pPr>
-            <a:r>
-              <a:rPr sz="1500" b="1">
-                <a:solidFill>
-                  <a:srgbClr val="FFFFFF"/>
-                </a:solidFill>
-                <a:latin typeface="Microsoft YaHei"/>
-                <a:ea typeface="Microsoft YaHei"/>
-                <a:cs typeface="Microsoft YaHei"/>
-              </a:rPr>
-              <a:t>④</a:t>
-            </a:r>
-          </a:p>
-        </p:txBody>
-      </p:sp>
-      <p:sp>
-        <p:nvSpPr>
-          <p:cNvPr id="14" name="p13-error-3">
-            <a:extLst xmlns:a="http://schemas.openxmlformats.org/drawingml/2006/main">
-              <a:ext uri="{FF2B5EF4-FFF2-40B4-BE49-F238E27FC236}">
-                <a16:creationId xmlns:a16="http://schemas.microsoft.com/office/drawing/2014/main" id="{1F6A043D-A8AE-4752-86B3-BAC7BD4CE27A}"/>
-              </a:ext>
-            </a:extLst>
-          </p:cNvPr>
-          <p:cNvSpPr>
-            <a:spLocks xmlns:a="http://schemas.openxmlformats.org/drawingml/2006/main" noGrp="1"/>
-          </p:cNvSpPr>
-          <p:nvPr/>
-        </p:nvSpPr>
-        <p:spPr>
-          <a:xfrm xmlns:a="http://schemas.openxmlformats.org/drawingml/2006/main">
-            <a:off x="4476750" y="2228850"/>
-            <a:ext cx="2647950" cy="400050"/>
-          </a:xfrm>
-          <a:prstGeom xmlns:a="http://schemas.openxmlformats.org/drawingml/2006/main" prst="rect">
-            <a:avLst/>
-          </a:prstGeom>
-          <a:solidFill xmlns:a="http://schemas.openxmlformats.org/drawingml/2006/main">
-            <a:srgbClr val="F8E9EA"/>
-          </a:solidFill>
-          <a:ln xmlns:a="http://schemas.openxmlformats.org/drawingml/2006/main" w="0">
-            <a:noFill/>
-            <a:prstDash val="solid"/>
-          </a:ln>
-        </p:spPr>
-        <p:txBody>
-          <a:bodyPr xmlns:a="http://schemas.openxmlformats.org/drawingml/2006/main" lIns="76200" tIns="38100" rIns="76200" bIns="38100" anchor="ctr"/>
-          <a:lstStyle xmlns:a="http://schemas.openxmlformats.org/drawingml/2006/main"/>
-          <a:p xmlns:a="http://schemas.openxmlformats.org/drawingml/2006/main">
-            <a:pPr algn="ctr">
-              <a:buNone/>
-              <a:defRPr sz="1350" b="1">
-                <a:solidFill>
-                  <a:srgbClr val="263746"/>
-                </a:solidFill>
-              </a:defRPr>
-            </a:pPr>
-            <a:r>
-              <a:rPr sz="1350" b="1">
-                <a:solidFill>
-                  <a:srgbClr val="263746"/>
-                </a:solidFill>
-                <a:latin typeface="Microsoft YaHei"/>
-                <a:ea typeface="Microsoft YaHei"/>
-                <a:cs typeface="Microsoft YaHei"/>
-              </a:rPr>
-              <a:t>冲突如何取舍</a:t>
-            </a:r>
-          </a:p>
-        </p:txBody>
-      </p:sp>
-      <p:sp>
-        <p:nvSpPr>
-          <p:cNvPr id="15" name="p13-x-4">
-            <a:extLst xmlns:a="http://schemas.openxmlformats.org/drawingml/2006/main">
-              <a:ext uri="{FF2B5EF4-FFF2-40B4-BE49-F238E27FC236}">
-                <a16:creationId xmlns:a16="http://schemas.microsoft.com/office/drawing/2014/main" id="{9E5DBEA8-798C-4526-94F9-9A4F070292FB}"/>
-              </a:ext>
-            </a:extLst>
-          </p:cNvPr>
-          <p:cNvSpPr>
-            <a:spLocks xmlns:a="http://schemas.openxmlformats.org/drawingml/2006/main" noGrp="1"/>
-          </p:cNvSpPr>
-          <p:nvPr/>
-        </p:nvSpPr>
-        <p:spPr>
-          <a:xfrm xmlns:a="http://schemas.openxmlformats.org/drawingml/2006/main">
-            <a:off x="723900" y="2895600"/>
-            <a:ext cx="400050" cy="400050"/>
-          </a:xfrm>
-          <a:prstGeom xmlns:a="http://schemas.openxmlformats.org/drawingml/2006/main" prst="roundRect">
-            <a:avLst>
-              <a:gd name="adj" fmla="val 19048"/>
-            </a:avLst>
-          </a:prstGeom>
-          <a:solidFill xmlns:a="http://schemas.openxmlformats.org/drawingml/2006/main">
-            <a:srgbClr val="C8161E"/>
-          </a:solidFill>
-          <a:ln xmlns:a="http://schemas.openxmlformats.org/drawingml/2006/main" w="0">
-            <a:noFill/>
-            <a:prstDash val="solid"/>
-          </a:ln>
-        </p:spPr>
-        <p:txBody>
-          <a:bodyPr xmlns:a="http://schemas.openxmlformats.org/drawingml/2006/main" lIns="76200" tIns="38100" rIns="76200" bIns="38100" anchor="ctr"/>
-          <a:lstStyle xmlns:a="http://schemas.openxmlformats.org/drawingml/2006/main"/>
-          <a:p xmlns:a="http://schemas.openxmlformats.org/drawingml/2006/main">
-            <a:pPr algn="ctr">
-              <a:buNone/>
-              <a:defRPr sz="1500" b="1">
-                <a:solidFill>
-                  <a:srgbClr val="FFFFFF"/>
-                </a:solidFill>
-              </a:defRPr>
-            </a:pPr>
-            <a:r>
-              <a:rPr sz="1500" b="1">
-                <a:solidFill>
-                  <a:srgbClr val="FFFFFF"/>
-                </a:solidFill>
-                <a:latin typeface="Microsoft YaHei"/>
-                <a:ea typeface="Microsoft YaHei"/>
-                <a:cs typeface="Microsoft YaHei"/>
-              </a:rPr>
-              <a:t>⑤</a:t>
-            </a:r>
-          </a:p>
-        </p:txBody>
-      </p:sp>
-      <p:sp>
-        <p:nvSpPr>
-          <p:cNvPr id="16" name="p13-error-4">
-            <a:extLst xmlns:a="http://schemas.openxmlformats.org/drawingml/2006/main">
-              <a:ext uri="{FF2B5EF4-FFF2-40B4-BE49-F238E27FC236}">
-                <a16:creationId xmlns:a16="http://schemas.microsoft.com/office/drawing/2014/main" id="{151BA0B4-FEE8-44EE-9F74-7156E548325F}"/>
-              </a:ext>
-            </a:extLst>
-          </p:cNvPr>
-          <p:cNvSpPr>
-            <a:spLocks xmlns:a="http://schemas.openxmlformats.org/drawingml/2006/main" noGrp="1"/>
-          </p:cNvSpPr>
-          <p:nvPr/>
-        </p:nvSpPr>
-        <p:spPr>
-          <a:xfrm xmlns:a="http://schemas.openxmlformats.org/drawingml/2006/main">
-            <a:off x="1200150" y="2895600"/>
-            <a:ext cx="2647950" cy="400050"/>
-          </a:xfrm>
-          <a:prstGeom xmlns:a="http://schemas.openxmlformats.org/drawingml/2006/main" prst="rect">
-            <a:avLst/>
-          </a:prstGeom>
-          <a:solidFill xmlns:a="http://schemas.openxmlformats.org/drawingml/2006/main">
-            <a:srgbClr val="F8E9EA"/>
-          </a:solidFill>
-          <a:ln xmlns:a="http://schemas.openxmlformats.org/drawingml/2006/main" w="0">
-            <a:noFill/>
-            <a:prstDash val="solid"/>
-          </a:ln>
-        </p:spPr>
-        <p:txBody>
-          <a:bodyPr xmlns:a="http://schemas.openxmlformats.org/drawingml/2006/main" lIns="76200" tIns="38100" rIns="76200" bIns="38100" anchor="ctr"/>
-          <a:lstStyle xmlns:a="http://schemas.openxmlformats.org/drawingml/2006/main"/>
-          <a:p xmlns:a="http://schemas.openxmlformats.org/drawingml/2006/main">
-            <a:pPr algn="ctr">
-              <a:buNone/>
-              <a:defRPr sz="1350" b="1">
-                <a:solidFill>
-                  <a:srgbClr val="263746"/>
-                </a:solidFill>
-              </a:defRPr>
-            </a:pPr>
-            <a:r>
-              <a:rPr sz="1350" b="1">
-                <a:solidFill>
-                  <a:srgbClr val="263746"/>
-                </a:solidFill>
-                <a:latin typeface="Microsoft YaHei"/>
-                <a:ea typeface="Microsoft YaHei"/>
-                <a:cs typeface="Microsoft YaHei"/>
-              </a:rPr>
-              <a:t>实验是否公平</a:t>
-            </a:r>
-          </a:p>
-        </p:txBody>
-      </p:sp>
-      <p:sp>
-        <p:nvSpPr>
-          <p:cNvPr id="17" name="p13-x-5">
-            <a:extLst xmlns:a="http://schemas.openxmlformats.org/drawingml/2006/main">
-              <a:ext uri="{FF2B5EF4-FFF2-40B4-BE49-F238E27FC236}">
-                <a16:creationId xmlns:a16="http://schemas.microsoft.com/office/drawing/2014/main" id="{C61256D1-2788-4035-B1FE-2F296955B0C7}"/>
-              </a:ext>
-            </a:extLst>
-          </p:cNvPr>
-          <p:cNvSpPr>
-            <a:spLocks xmlns:a="http://schemas.openxmlformats.org/drawingml/2006/main" noGrp="1"/>
-          </p:cNvSpPr>
-          <p:nvPr/>
-        </p:nvSpPr>
-        <p:spPr>
-          <a:xfrm xmlns:a="http://schemas.openxmlformats.org/drawingml/2006/main">
-            <a:off x="4000500" y="2895600"/>
-            <a:ext cx="400050" cy="400050"/>
-          </a:xfrm>
-          <a:prstGeom xmlns:a="http://schemas.openxmlformats.org/drawingml/2006/main" prst="roundRect">
-            <a:avLst>
-              <a:gd name="adj" fmla="val 19048"/>
-            </a:avLst>
-          </a:prstGeom>
-          <a:solidFill xmlns:a="http://schemas.openxmlformats.org/drawingml/2006/main">
-            <a:srgbClr val="C8161E"/>
-          </a:solidFill>
-          <a:ln xmlns:a="http://schemas.openxmlformats.org/drawingml/2006/main" w="0">
-            <a:noFill/>
-            <a:prstDash val="solid"/>
-          </a:ln>
-        </p:spPr>
-        <p:txBody>
-          <a:bodyPr xmlns:a="http://schemas.openxmlformats.org/drawingml/2006/main" lIns="76200" tIns="38100" rIns="76200" bIns="38100" anchor="ctr"/>
-          <a:lstStyle xmlns:a="http://schemas.openxmlformats.org/drawingml/2006/main"/>
-          <a:p xmlns:a="http://schemas.openxmlformats.org/drawingml/2006/main">
-            <a:pPr algn="ctr">
-              <a:buNone/>
-              <a:defRPr sz="1500" b="1">
-                <a:solidFill>
-                  <a:srgbClr val="FFFFFF"/>
-                </a:solidFill>
-              </a:defRPr>
-            </a:pPr>
-            <a:r>
-              <a:rPr sz="1500" b="1">
-                <a:solidFill>
-                  <a:srgbClr val="FFFFFF"/>
-                </a:solidFill>
-                <a:latin typeface="Microsoft YaHei"/>
-                <a:ea typeface="Microsoft YaHei"/>
-                <a:cs typeface="Microsoft YaHei"/>
-              </a:rPr>
-              <a:t>⑥</a:t>
-            </a:r>
-          </a:p>
-        </p:txBody>
-      </p:sp>
-      <p:sp>
-        <p:nvSpPr>
-          <p:cNvPr id="18" name="p13-error-5">
-            <a:extLst xmlns:a="http://schemas.openxmlformats.org/drawingml/2006/main">
-              <a:ext uri="{FF2B5EF4-FFF2-40B4-BE49-F238E27FC236}">
-                <a16:creationId xmlns:a16="http://schemas.microsoft.com/office/drawing/2014/main" id="{255FAFB0-BB24-41C3-BF55-3A6930FA2767}"/>
-              </a:ext>
-            </a:extLst>
-          </p:cNvPr>
-          <p:cNvSpPr>
-            <a:spLocks xmlns:a="http://schemas.openxmlformats.org/drawingml/2006/main" noGrp="1"/>
-          </p:cNvSpPr>
-          <p:nvPr/>
-        </p:nvSpPr>
-        <p:spPr>
-          <a:xfrm xmlns:a="http://schemas.openxmlformats.org/drawingml/2006/main">
-            <a:off x="4476750" y="2895600"/>
-            <a:ext cx="2647950" cy="400050"/>
-          </a:xfrm>
-          <a:prstGeom xmlns:a="http://schemas.openxmlformats.org/drawingml/2006/main" prst="rect">
-            <a:avLst/>
-          </a:prstGeom>
-          <a:solidFill xmlns:a="http://schemas.openxmlformats.org/drawingml/2006/main">
-            <a:srgbClr val="F8E9EA"/>
-          </a:solidFill>
-          <a:ln xmlns:a="http://schemas.openxmlformats.org/drawingml/2006/main" w="0">
-            <a:noFill/>
-            <a:prstDash val="solid"/>
-          </a:ln>
-        </p:spPr>
-        <p:txBody>
-          <a:bodyPr xmlns:a="http://schemas.openxmlformats.org/drawingml/2006/main" lIns="76200" tIns="38100" rIns="76200" bIns="38100" anchor="ctr"/>
-          <a:lstStyle xmlns:a="http://schemas.openxmlformats.org/drawingml/2006/main"/>
-          <a:p xmlns:a="http://schemas.openxmlformats.org/drawingml/2006/main">
-            <a:pPr algn="ctr">
-              <a:buNone/>
-              <a:defRPr sz="1350" b="1">
-                <a:solidFill>
-                  <a:srgbClr val="263746"/>
-                </a:solidFill>
-              </a:defRPr>
-            </a:pPr>
-            <a:r>
-              <a:rPr sz="1350" b="1">
-                <a:solidFill>
-                  <a:srgbClr val="263746"/>
-                </a:solidFill>
-                <a:latin typeface="Microsoft YaHei"/>
-                <a:ea typeface="Microsoft YaHei"/>
-                <a:cs typeface="Microsoft YaHei"/>
-              </a:rPr>
-              <a:t>失败是否应保留</a:t>
-            </a:r>
-          </a:p>
-        </p:txBody>
-      </p:sp>
-      <p:sp>
-        <p:nvSpPr>
-          <p:cNvPr id="19" name="p13-x-6">
-            <a:extLst xmlns:a="http://schemas.openxmlformats.org/drawingml/2006/main">
-              <a:ext uri="{FF2B5EF4-FFF2-40B4-BE49-F238E27FC236}">
-                <a16:creationId xmlns:a16="http://schemas.microsoft.com/office/drawing/2014/main" id="{AD019980-8AFC-46EC-9354-D56606D3C037}"/>
-              </a:ext>
-            </a:extLst>
-          </p:cNvPr>
-          <p:cNvSpPr>
-            <a:spLocks xmlns:a="http://schemas.openxmlformats.org/drawingml/2006/main" noGrp="1"/>
-          </p:cNvSpPr>
-          <p:nvPr/>
-        </p:nvSpPr>
-        <p:spPr>
-          <a:xfrm xmlns:a="http://schemas.openxmlformats.org/drawingml/2006/main">
-            <a:off x="723900" y="3562350"/>
-            <a:ext cx="400050" cy="400050"/>
-          </a:xfrm>
-          <a:prstGeom xmlns:a="http://schemas.openxmlformats.org/drawingml/2006/main" prst="roundRect">
-            <a:avLst>
-              <a:gd name="adj" fmla="val 19048"/>
-            </a:avLst>
-          </a:prstGeom>
-          <a:solidFill xmlns:a="http://schemas.openxmlformats.org/drawingml/2006/main">
-            <a:srgbClr val="C8161E"/>
-          </a:solidFill>
-          <a:ln xmlns:a="http://schemas.openxmlformats.org/drawingml/2006/main" w="0">
-            <a:noFill/>
-            <a:prstDash val="solid"/>
-          </a:ln>
-        </p:spPr>
-        <p:txBody>
-          <a:bodyPr xmlns:a="http://schemas.openxmlformats.org/drawingml/2006/main" lIns="76200" tIns="38100" rIns="76200" bIns="38100" anchor="ctr"/>
-          <a:lstStyle xmlns:a="http://schemas.openxmlformats.org/drawingml/2006/main"/>
-          <a:p xmlns:a="http://schemas.openxmlformats.org/drawingml/2006/main">
-            <a:pPr algn="ctr">
-              <a:buNone/>
-              <a:defRPr sz="1500" b="1">
-                <a:solidFill>
-                  <a:srgbClr val="FFFFFF"/>
-                </a:solidFill>
-              </a:defRPr>
-            </a:pPr>
-            <a:r>
-              <a:rPr sz="1500" b="1">
-                <a:solidFill>
-                  <a:srgbClr val="FFFFFF"/>
-                </a:solidFill>
-                <a:latin typeface="Microsoft YaHei"/>
-                <a:ea typeface="Microsoft YaHei"/>
-                <a:cs typeface="Microsoft YaHei"/>
-              </a:rPr>
-              <a:t>⑦</a:t>
-            </a:r>
-          </a:p>
-        </p:txBody>
-      </p:sp>
-      <p:sp>
-        <p:nvSpPr>
-          <p:cNvPr id="20" name="p13-error-6">
-            <a:extLst xmlns:a="http://schemas.openxmlformats.org/drawingml/2006/main">
-              <a:ext uri="{FF2B5EF4-FFF2-40B4-BE49-F238E27FC236}">
-                <a16:creationId xmlns:a16="http://schemas.microsoft.com/office/drawing/2014/main" id="{9E22E102-87E5-478A-B39B-35D3C0EA5564}"/>
-              </a:ext>
-            </a:extLst>
-          </p:cNvPr>
-          <p:cNvSpPr>
-            <a:spLocks xmlns:a="http://schemas.openxmlformats.org/drawingml/2006/main" noGrp="1"/>
-          </p:cNvSpPr>
-          <p:nvPr/>
-        </p:nvSpPr>
-        <p:spPr>
-          <a:xfrm xmlns:a="http://schemas.openxmlformats.org/drawingml/2006/main">
-            <a:off x="1200150" y="3562350"/>
-            <a:ext cx="2647950" cy="400050"/>
-          </a:xfrm>
-          <a:prstGeom xmlns:a="http://schemas.openxmlformats.org/drawingml/2006/main" prst="rect">
-            <a:avLst/>
-          </a:prstGeom>
-          <a:solidFill xmlns:a="http://schemas.openxmlformats.org/drawingml/2006/main">
-            <a:srgbClr val="F8E9EA"/>
-          </a:solidFill>
-          <a:ln xmlns:a="http://schemas.openxmlformats.org/drawingml/2006/main" w="0">
-            <a:noFill/>
-            <a:prstDash val="solid"/>
-          </a:ln>
-        </p:spPr>
-        <p:txBody>
-          <a:bodyPr xmlns:a="http://schemas.openxmlformats.org/drawingml/2006/main" lIns="76200" tIns="38100" rIns="76200" bIns="38100" anchor="ctr"/>
-          <a:lstStyle xmlns:a="http://schemas.openxmlformats.org/drawingml/2006/main"/>
-          <a:p xmlns:a="http://schemas.openxmlformats.org/drawingml/2006/main">
-            <a:pPr algn="ctr">
-              <a:buNone/>
-              <a:defRPr sz="1350" b="1">
-                <a:solidFill>
-                  <a:srgbClr val="263746"/>
-                </a:solidFill>
-              </a:defRPr>
-            </a:pPr>
-            <a:r>
-              <a:rPr sz="1350" b="1">
-                <a:solidFill>
-                  <a:srgbClr val="263746"/>
-                </a:solidFill>
-                <a:latin typeface="Microsoft YaHei"/>
-                <a:ea typeface="Microsoft YaHei"/>
-                <a:cs typeface="Microsoft YaHei"/>
-              </a:rPr>
-              <a:t>结论是否越界</a:t>
-            </a:r>
-          </a:p>
-        </p:txBody>
-      </p:sp>
-      <p:sp>
-        <p:nvSpPr>
-          <p:cNvPr id="21" name="p13-x-7">
-            <a:extLst xmlns:a="http://schemas.openxmlformats.org/drawingml/2006/main">
-              <a:ext uri="{FF2B5EF4-FFF2-40B4-BE49-F238E27FC236}">
-                <a16:creationId xmlns:a16="http://schemas.microsoft.com/office/drawing/2014/main" id="{E5FBB88C-F771-4FA9-97EF-DC51A998E0B1}"/>
-              </a:ext>
-            </a:extLst>
-          </p:cNvPr>
-          <p:cNvSpPr>
-            <a:spLocks xmlns:a="http://schemas.openxmlformats.org/drawingml/2006/main" noGrp="1"/>
-          </p:cNvSpPr>
-          <p:nvPr/>
-        </p:nvSpPr>
-        <p:spPr>
-          <a:xfrm xmlns:a="http://schemas.openxmlformats.org/drawingml/2006/main">
-            <a:off x="4000500" y="3562350"/>
-            <a:ext cx="400050" cy="400050"/>
-          </a:xfrm>
-          <a:prstGeom xmlns:a="http://schemas.openxmlformats.org/drawingml/2006/main" prst="roundRect">
-            <a:avLst>
-              <a:gd name="adj" fmla="val 19048"/>
-            </a:avLst>
-          </a:prstGeom>
-          <a:solidFill xmlns:a="http://schemas.openxmlformats.org/drawingml/2006/main">
-            <a:srgbClr val="C8161E"/>
-          </a:solidFill>
-          <a:ln xmlns:a="http://schemas.openxmlformats.org/drawingml/2006/main" w="0">
-            <a:noFill/>
-            <a:prstDash val="solid"/>
-          </a:ln>
-        </p:spPr>
-        <p:txBody>
-          <a:bodyPr xmlns:a="http://schemas.openxmlformats.org/drawingml/2006/main" lIns="76200" tIns="38100" rIns="76200" bIns="38100" anchor="ctr"/>
-          <a:lstStyle xmlns:a="http://schemas.openxmlformats.org/drawingml/2006/main"/>
-          <a:p xmlns:a="http://schemas.openxmlformats.org/drawingml/2006/main">
-            <a:pPr algn="ctr">
-              <a:buNone/>
-              <a:defRPr sz="1500" b="1">
-                <a:solidFill>
-                  <a:srgbClr val="FFFFFF"/>
-                </a:solidFill>
-              </a:defRPr>
-            </a:pPr>
-            <a:r>
-              <a:rPr sz="1500" b="1">
-                <a:solidFill>
-                  <a:srgbClr val="FFFFFF"/>
-                </a:solidFill>
-                <a:latin typeface="Microsoft YaHei"/>
-                <a:ea typeface="Microsoft YaHei"/>
-                <a:cs typeface="Microsoft YaHei"/>
-              </a:rPr>
-              <a:t>⑧</a:t>
-            </a:r>
-          </a:p>
-        </p:txBody>
-      </p:sp>
-      <p:sp>
-        <p:nvSpPr>
-          <p:cNvPr id="22" name="p13-error-7">
-            <a:extLst xmlns:a="http://schemas.openxmlformats.org/drawingml/2006/main">
-              <a:ext uri="{FF2B5EF4-FFF2-40B4-BE49-F238E27FC236}">
-                <a16:creationId xmlns:a16="http://schemas.microsoft.com/office/drawing/2014/main" id="{A4E4223C-924D-49A9-A993-6E7D3C1DD05B}"/>
-              </a:ext>
-            </a:extLst>
-          </p:cNvPr>
-          <p:cNvSpPr>
-            <a:spLocks xmlns:a="http://schemas.openxmlformats.org/drawingml/2006/main" noGrp="1"/>
-          </p:cNvSpPr>
-          <p:nvPr/>
-        </p:nvSpPr>
-        <p:spPr>
-          <a:xfrm xmlns:a="http://schemas.openxmlformats.org/drawingml/2006/main">
-            <a:off x="4476750" y="3562350"/>
-            <a:ext cx="2647950" cy="400050"/>
-          </a:xfrm>
-          <a:prstGeom xmlns:a="http://schemas.openxmlformats.org/drawingml/2006/main" prst="rect">
-            <a:avLst/>
-          </a:prstGeom>
-          <a:solidFill xmlns:a="http://schemas.openxmlformats.org/drawingml/2006/main">
-            <a:srgbClr val="F8E9EA"/>
-          </a:solidFill>
-          <a:ln xmlns:a="http://schemas.openxmlformats.org/drawingml/2006/main" w="0">
-            <a:noFill/>
-            <a:prstDash val="solid"/>
-          </a:ln>
-        </p:spPr>
-        <p:txBody>
-          <a:bodyPr xmlns:a="http://schemas.openxmlformats.org/drawingml/2006/main" lIns="76200" tIns="38100" rIns="76200" bIns="38100" anchor="ctr"/>
-          <a:lstStyle xmlns:a="http://schemas.openxmlformats.org/drawingml/2006/main"/>
-          <a:p xmlns:a="http://schemas.openxmlformats.org/drawingml/2006/main">
-            <a:pPr algn="ctr">
-              <a:buNone/>
-              <a:defRPr sz="1350" b="1">
-                <a:solidFill>
-                  <a:srgbClr val="263746"/>
-                </a:solidFill>
-              </a:defRPr>
-            </a:pPr>
-            <a:r>
-              <a:rPr sz="1350" b="1">
-                <a:solidFill>
-                  <a:srgbClr val="263746"/>
-                </a:solidFill>
-                <a:latin typeface="Microsoft YaHei"/>
-                <a:ea typeface="Microsoft YaHei"/>
-                <a:cs typeface="Microsoft YaHei"/>
-              </a:rPr>
-              <a:t>伦理是否可接受</a:t>
-            </a:r>
-          </a:p>
-        </p:txBody>
-      </p:sp>
-      <p:sp>
-        <p:nvSpPr>
-          <p:cNvPr id="23" name="p13-x-8">
-            <a:extLst xmlns:a="http://schemas.openxmlformats.org/drawingml/2006/main">
-              <a:ext uri="{FF2B5EF4-FFF2-40B4-BE49-F238E27FC236}">
-                <a16:creationId xmlns:a16="http://schemas.microsoft.com/office/drawing/2014/main" id="{575E9852-B4C2-4309-8394-D02D9439DB79}"/>
-              </a:ext>
-            </a:extLst>
-          </p:cNvPr>
-          <p:cNvSpPr>
-            <a:spLocks xmlns:a="http://schemas.openxmlformats.org/drawingml/2006/main" noGrp="1"/>
-          </p:cNvSpPr>
-          <p:nvPr/>
-        </p:nvSpPr>
-        <p:spPr>
-          <a:xfrm xmlns:a="http://schemas.openxmlformats.org/drawingml/2006/main">
-            <a:off x="723900" y="4229100"/>
-            <a:ext cx="400050" cy="400050"/>
-          </a:xfrm>
-          <a:prstGeom xmlns:a="http://schemas.openxmlformats.org/drawingml/2006/main" prst="roundRect">
-            <a:avLst>
-              <a:gd name="adj" fmla="val 19048"/>
-            </a:avLst>
-          </a:prstGeom>
-          <a:solidFill xmlns:a="http://schemas.openxmlformats.org/drawingml/2006/main">
-            <a:srgbClr val="C8161E"/>
-          </a:solidFill>
-          <a:ln xmlns:a="http://schemas.openxmlformats.org/drawingml/2006/main" w="0">
-            <a:noFill/>
-            <a:prstDash val="solid"/>
-          </a:ln>
-        </p:spPr>
-        <p:txBody>
-          <a:bodyPr xmlns:a="http://schemas.openxmlformats.org/drawingml/2006/main" lIns="76200" tIns="38100" rIns="76200" bIns="38100" anchor="ctr"/>
-          <a:lstStyle xmlns:a="http://schemas.openxmlformats.org/drawingml/2006/main"/>
-          <a:p xmlns:a="http://schemas.openxmlformats.org/drawingml/2006/main">
-            <a:pPr algn="ctr">
-              <a:buNone/>
-              <a:defRPr sz="1500" b="1">
-                <a:solidFill>
-                  <a:srgbClr val="FFFFFF"/>
-                </a:solidFill>
-              </a:defRPr>
-            </a:pPr>
-            <a:r>
-              <a:rPr sz="1500" b="1">
-                <a:solidFill>
-                  <a:srgbClr val="FFFFFF"/>
-                </a:solidFill>
-                <a:latin typeface="Microsoft YaHei"/>
-                <a:ea typeface="Microsoft YaHei"/>
-                <a:cs typeface="Microsoft YaHei"/>
-              </a:rPr>
-              <a:t>⑨</a:t>
-            </a:r>
-          </a:p>
-        </p:txBody>
-      </p:sp>
-      <p:sp>
-        <p:nvSpPr>
-          <p:cNvPr id="24" name="p13-error-8">
-            <a:extLst xmlns:a="http://schemas.openxmlformats.org/drawingml/2006/main">
-              <a:ext uri="{FF2B5EF4-FFF2-40B4-BE49-F238E27FC236}">
-                <a16:creationId xmlns:a16="http://schemas.microsoft.com/office/drawing/2014/main" id="{01208096-F7E3-47B1-8146-77992ACB96AD}"/>
-              </a:ext>
-            </a:extLst>
-          </p:cNvPr>
-          <p:cNvSpPr>
-            <a:spLocks xmlns:a="http://schemas.openxmlformats.org/drawingml/2006/main" noGrp="1"/>
-          </p:cNvSpPr>
-          <p:nvPr/>
-        </p:nvSpPr>
-        <p:spPr>
-          <a:xfrm xmlns:a="http://schemas.openxmlformats.org/drawingml/2006/main">
-            <a:off x="1200150" y="4229100"/>
-            <a:ext cx="2647950" cy="400050"/>
-          </a:xfrm>
-          <a:prstGeom xmlns:a="http://schemas.openxmlformats.org/drawingml/2006/main" prst="rect">
-            <a:avLst/>
-          </a:prstGeom>
-          <a:solidFill xmlns:a="http://schemas.openxmlformats.org/drawingml/2006/main">
-            <a:srgbClr val="F8E9EA"/>
-          </a:solidFill>
-          <a:ln xmlns:a="http://schemas.openxmlformats.org/drawingml/2006/main" w="0">
-            <a:noFill/>
-            <a:prstDash val="solid"/>
-          </a:ln>
-        </p:spPr>
-        <p:txBody>
-          <a:bodyPr xmlns:a="http://schemas.openxmlformats.org/drawingml/2006/main" lIns="76200" tIns="38100" rIns="76200" bIns="38100" anchor="ctr"/>
-          <a:lstStyle xmlns:a="http://schemas.openxmlformats.org/drawingml/2006/main"/>
-          <a:p xmlns:a="http://schemas.openxmlformats.org/drawingml/2006/main">
-            <a:pPr algn="ctr">
-              <a:buNone/>
-              <a:defRPr sz="1350" b="1">
-                <a:solidFill>
-                  <a:srgbClr val="263746"/>
-                </a:solidFill>
-              </a:defRPr>
-            </a:pPr>
-            <a:r>
-              <a:rPr sz="1350" b="1">
-                <a:solidFill>
-                  <a:srgbClr val="263746"/>
-                </a:solidFill>
-                <a:latin typeface="Microsoft YaHei"/>
-                <a:ea typeface="Microsoft YaHei"/>
-                <a:cs typeface="Microsoft YaHei"/>
-              </a:rPr>
-              <a:t>何时停止与发布</a:t>
-            </a:r>
-          </a:p>
-        </p:txBody>
-      </p:sp>
-      <p:sp>
-        <p:nvSpPr>
-          <p:cNvPr id="25" name="p13-x-9">
-            <a:extLst xmlns:a="http://schemas.openxmlformats.org/drawingml/2006/main">
-              <a:ext uri="{FF2B5EF4-FFF2-40B4-BE49-F238E27FC236}">
-                <a16:creationId xmlns:a16="http://schemas.microsoft.com/office/drawing/2014/main" id="{AEF743C4-2D61-4E8B-B551-4B55F43437FE}"/>
-              </a:ext>
-            </a:extLst>
-          </p:cNvPr>
-          <p:cNvSpPr>
-            <a:spLocks xmlns:a="http://schemas.openxmlformats.org/drawingml/2006/main" noGrp="1"/>
-          </p:cNvSpPr>
-          <p:nvPr/>
-        </p:nvSpPr>
-        <p:spPr>
-          <a:xfrm xmlns:a="http://schemas.openxmlformats.org/drawingml/2006/main">
-            <a:off x="4000500" y="4229100"/>
-            <a:ext cx="400050" cy="400050"/>
-          </a:xfrm>
-          <a:prstGeom xmlns:a="http://schemas.openxmlformats.org/drawingml/2006/main" prst="roundRect">
-            <a:avLst>
-              <a:gd name="adj" fmla="val 19048"/>
-            </a:avLst>
-          </a:prstGeom>
-          <a:solidFill xmlns:a="http://schemas.openxmlformats.org/drawingml/2006/main">
-            <a:srgbClr val="C8161E"/>
-          </a:solidFill>
-          <a:ln xmlns:a="http://schemas.openxmlformats.org/drawingml/2006/main" w="0">
-            <a:noFill/>
-            <a:prstDash val="solid"/>
-          </a:ln>
-        </p:spPr>
-        <p:txBody>
-          <a:bodyPr xmlns:a="http://schemas.openxmlformats.org/drawingml/2006/main" lIns="76200" tIns="38100" rIns="76200" bIns="38100" anchor="ctr"/>
-          <a:lstStyle xmlns:a="http://schemas.openxmlformats.org/drawingml/2006/main"/>
-          <a:p xmlns:a="http://schemas.openxmlformats.org/drawingml/2006/main">
-            <a:pPr algn="ctr">
-              <a:buNone/>
-              <a:defRPr sz="1500" b="1">
-                <a:solidFill>
-                  <a:srgbClr val="FFFFFF"/>
-                </a:solidFill>
-              </a:defRPr>
-            </a:pPr>
-            <a:r>
-              <a:rPr sz="1500" b="1">
-                <a:solidFill>
-                  <a:srgbClr val="FFFFFF"/>
-                </a:solidFill>
-                <a:latin typeface="Microsoft YaHei"/>
-                <a:ea typeface="Microsoft YaHei"/>
-                <a:cs typeface="Microsoft YaHei"/>
-              </a:rPr>
-              <a:t>—</a:t>
-            </a:r>
-          </a:p>
-        </p:txBody>
-      </p:sp>
-      <p:sp>
-        <p:nvSpPr>
-          <p:cNvPr id="26" name="p13-error-9">
-            <a:extLst xmlns:a="http://schemas.openxmlformats.org/drawingml/2006/main">
-              <a:ext uri="{FF2B5EF4-FFF2-40B4-BE49-F238E27FC236}">
-                <a16:creationId xmlns:a16="http://schemas.microsoft.com/office/drawing/2014/main" id="{08508FCF-FFCD-4A35-88B6-5E044F2E5EC5}"/>
-              </a:ext>
-            </a:extLst>
-          </p:cNvPr>
-          <p:cNvSpPr>
-            <a:spLocks xmlns:a="http://schemas.openxmlformats.org/drawingml/2006/main" noGrp="1"/>
-          </p:cNvSpPr>
-          <p:nvPr/>
-        </p:nvSpPr>
-        <p:spPr>
-          <a:xfrm xmlns:a="http://schemas.openxmlformats.org/drawingml/2006/main">
-            <a:off x="4476750" y="4229100"/>
-            <a:ext cx="2647950" cy="400050"/>
-          </a:xfrm>
-          <a:prstGeom xmlns:a="http://schemas.openxmlformats.org/drawingml/2006/main" prst="rect">
-            <a:avLst/>
-          </a:prstGeom>
-          <a:solidFill xmlns:a="http://schemas.openxmlformats.org/drawingml/2006/main">
-            <a:srgbClr val="F8E9EA"/>
-          </a:solidFill>
-          <a:ln xmlns:a="http://schemas.openxmlformats.org/drawingml/2006/main" w="0">
-            <a:noFill/>
-            <a:prstDash val="solid"/>
-          </a:ln>
-        </p:spPr>
-        <p:txBody>
-          <a:bodyPr xmlns:a="http://schemas.openxmlformats.org/drawingml/2006/main" lIns="76200" tIns="38100" rIns="76200" bIns="38100" anchor="ctr"/>
-          <a:lstStyle xmlns:a="http://schemas.openxmlformats.org/drawingml/2006/main"/>
-          <a:p xmlns:a="http://schemas.openxmlformats.org/drawingml/2006/main">
-            <a:pPr algn="ctr">
-              <a:buNone/>
-              <a:defRPr sz="1350" b="1">
-                <a:solidFill>
-                  <a:srgbClr val="263746"/>
-                </a:solidFill>
-              </a:defRPr>
-            </a:pPr>
-            <a:r>
-              <a:rPr sz="1350" b="1">
-                <a:solidFill>
-                  <a:srgbClr val="263746"/>
-                </a:solidFill>
-                <a:latin typeface="Microsoft YaHei"/>
-                <a:ea typeface="Microsoft YaHei"/>
-                <a:cs typeface="Microsoft YaHei"/>
-              </a:rPr>
-              <a:t>责任不能转移给模型</a:t>
-            </a:r>
-          </a:p>
-        </p:txBody>
-      </p:sp>
-      <p:sp>
-        <p:nvSpPr>
-          <p:cNvPr id="27" name="p13-separator">
-            <a:extLst xmlns:a="http://schemas.openxmlformats.org/drawingml/2006/main">
-              <a:ext uri="{FF2B5EF4-FFF2-40B4-BE49-F238E27FC236}">
-                <a16:creationId xmlns:a16="http://schemas.microsoft.com/office/drawing/2014/main" id="{FC411C60-7AA1-4222-AC96-6C471DC3AE5C}"/>
-              </a:ext>
-            </a:extLst>
-          </p:cNvPr>
-          <p:cNvSpPr>
-            <a:spLocks xmlns:a="http://schemas.openxmlformats.org/drawingml/2006/main" noGrp="1"/>
-          </p:cNvSpPr>
-          <p:nvPr/>
-        </p:nvSpPr>
-        <p:spPr>
-          <a:xfrm xmlns:a="http://schemas.openxmlformats.org/drawingml/2006/main" rot="5400000">
-            <a:off x="5438775" y="2990850"/>
-            <a:ext cx="3905250" cy="19050"/>
-          </a:xfrm>
-          <a:prstGeom xmlns:a="http://schemas.openxmlformats.org/drawingml/2006/main" prst="rect">
-            <a:avLst/>
-          </a:prstGeom>
-          <a:solidFill xmlns:a="http://schemas.openxmlformats.org/drawingml/2006/main">
-            <a:srgbClr val="D6DDE2"/>
-          </a:solidFill>
-          <a:ln xmlns:a="http://schemas.openxmlformats.org/drawingml/2006/main" w="0">
-            <a:noFill/>
-            <a:prstDash val="solid"/>
-          </a:ln>
-        </p:spPr>
-      </p:sp>
-      <p:sp>
-        <p:nvSpPr>
-          <p:cNvPr id="28" name="p13-questions-title">
-            <a:extLst xmlns:a="http://schemas.openxmlformats.org/drawingml/2006/main">
-              <a:ext uri="{FF2B5EF4-FFF2-40B4-BE49-F238E27FC236}">
-                <a16:creationId xmlns:a16="http://schemas.microsoft.com/office/drawing/2014/main" id="{07F68B3E-4D24-4B98-8AC7-98E59B3DC9C7}"/>
-              </a:ext>
-            </a:extLst>
-          </p:cNvPr>
-          <p:cNvSpPr>
-            <a:spLocks xmlns:a="http://schemas.openxmlformats.org/drawingml/2006/main" noGrp="1"/>
-          </p:cNvSpPr>
-          <p:nvPr/>
-        </p:nvSpPr>
-        <p:spPr>
-          <a:xfrm xmlns:a="http://schemas.openxmlformats.org/drawingml/2006/main">
-            <a:off x="7810500" y="990600"/>
-            <a:ext cx="3638550" cy="438150"/>
-          </a:xfrm>
-          <a:prstGeom xmlns:a="http://schemas.openxmlformats.org/drawingml/2006/main" prst="rect">
-            <a:avLst/>
-          </a:prstGeom>
-          <a:noFill xmlns:a="http://schemas.openxmlformats.org/drawingml/2006/main"/>
-          <a:ln xmlns:a="http://schemas.openxmlformats.org/drawingml/2006/main" w="0">
-            <a:noFill/>
-            <a:prstDash val="solid"/>
-          </a:ln>
-        </p:spPr>
-        <p:txBody>
-          <a:bodyPr xmlns:a="http://schemas.openxmlformats.org/drawingml/2006/main" lIns="76200" tIns="38100" rIns="76200" bIns="38100" anchor="ctr"/>
-          <a:lstStyle xmlns:a="http://schemas.openxmlformats.org/drawingml/2006/main"/>
-          <a:p xmlns:a="http://schemas.openxmlformats.org/drawingml/2006/main">
-            <a:pPr algn="ctr">
-              <a:buNone/>
-              <a:defRPr sz="1875" b="1">
-                <a:solidFill>
-                  <a:srgbClr val="18354E"/>
-                </a:solidFill>
-              </a:defRPr>
-            </a:pPr>
-            <a:r>
-              <a:rPr sz="1875" b="1">
-                <a:solidFill>
-                  <a:srgbClr val="18354E"/>
-                </a:solidFill>
-                <a:latin typeface="Microsoft YaHei"/>
-                <a:ea typeface="Microsoft YaHei"/>
-                <a:cs typeface="Microsoft YaHei"/>
-              </a:rPr>
-              <a:t>AI 可以帮助</a:t>
-            </a:r>
-          </a:p>
-        </p:txBody>
-      </p:sp>
-      <p:sp>
-        <p:nvSpPr>
-          <p:cNvPr id="29" name="p13-qn-0">
-            <a:extLst xmlns:a="http://schemas.openxmlformats.org/drawingml/2006/main">
-              <a:ext uri="{FF2B5EF4-FFF2-40B4-BE49-F238E27FC236}">
-                <a16:creationId xmlns:a16="http://schemas.microsoft.com/office/drawing/2014/main" id="{521BF812-6EBE-4AF2-B74E-A3DB303F4F81}"/>
-              </a:ext>
-            </a:extLst>
-          </p:cNvPr>
-          <p:cNvSpPr>
-            <a:spLocks xmlns:a="http://schemas.openxmlformats.org/drawingml/2006/main" noGrp="1"/>
-          </p:cNvSpPr>
-          <p:nvPr/>
-        </p:nvSpPr>
-        <p:spPr>
-          <a:xfrm xmlns:a="http://schemas.openxmlformats.org/drawingml/2006/main">
-            <a:off x="7848600" y="1562100"/>
-            <a:ext cx="400050" cy="400050"/>
-          </a:xfrm>
-          <a:prstGeom xmlns:a="http://schemas.openxmlformats.org/drawingml/2006/main" prst="roundRect">
-            <a:avLst>
-              <a:gd name="adj" fmla="val 19048"/>
-            </a:avLst>
-          </a:prstGeom>
-          <a:solidFill xmlns:a="http://schemas.openxmlformats.org/drawingml/2006/main">
-            <a:srgbClr val="18354E"/>
-          </a:solidFill>
-          <a:ln xmlns:a="http://schemas.openxmlformats.org/drawingml/2006/main" w="0">
-            <a:noFill/>
-            <a:prstDash val="solid"/>
-          </a:ln>
-        </p:spPr>
-        <p:txBody>
-          <a:bodyPr xmlns:a="http://schemas.openxmlformats.org/drawingml/2006/main" lIns="76200" tIns="38100" rIns="76200" bIns="38100" anchor="ctr"/>
-          <a:lstStyle xmlns:a="http://schemas.openxmlformats.org/drawingml/2006/main"/>
-          <a:p xmlns:a="http://schemas.openxmlformats.org/drawingml/2006/main">
-            <a:pPr algn="ctr">
-              <a:buNone/>
-              <a:defRPr sz="1275" b="1">
-                <a:solidFill>
-                  <a:srgbClr val="FFFFFF"/>
-                </a:solidFill>
-              </a:defRPr>
-            </a:pPr>
-            <a:r>
-              <a:rPr sz="1275" b="1">
                 <a:solidFill>
                   <a:srgbClr val="FFFFFF"/>
                 </a:solidFill>
@@ -17744,113 +16357,184 @@
                 <a:ea typeface="Arial"/>
                 <a:cs typeface="Arial"/>
               </a:rPr>
-              <a:t>I</a:t>
-            </a:r>
-          </a:p>
-        </p:txBody>
-      </p:sp>
-      <p:sp>
-        <p:nvSpPr>
-          <p:cNvPr id="30" name="p13-q-0">
-            <a:extLst xmlns:a="http://schemas.openxmlformats.org/drawingml/2006/main">
-              <a:ext uri="{FF2B5EF4-FFF2-40B4-BE49-F238E27FC236}">
-                <a16:creationId xmlns:a16="http://schemas.microsoft.com/office/drawing/2014/main" id="{060EB3D3-F55B-4087-89C8-2F919B4534BD}"/>
-              </a:ext>
-            </a:extLst>
-          </p:cNvPr>
-          <p:cNvSpPr>
-            <a:spLocks xmlns:a="http://schemas.openxmlformats.org/drawingml/2006/main" noGrp="1"/>
-          </p:cNvSpPr>
-          <p:nvPr/>
-        </p:nvSpPr>
-        <p:spPr>
-          <a:xfrm xmlns:a="http://schemas.openxmlformats.org/drawingml/2006/main">
-            <a:off x="8343900" y="1562100"/>
-            <a:ext cx="3048000" cy="400050"/>
-          </a:xfrm>
-          <a:prstGeom xmlns:a="http://schemas.openxmlformats.org/drawingml/2006/main" prst="rect">
-            <a:avLst/>
-          </a:prstGeom>
-          <a:solidFill xmlns:a="http://schemas.openxmlformats.org/drawingml/2006/main">
-            <a:srgbClr val="E8F0F6"/>
-          </a:solidFill>
-          <a:ln xmlns:a="http://schemas.openxmlformats.org/drawingml/2006/main" w="0">
-            <a:noFill/>
-            <a:prstDash val="solid"/>
-          </a:ln>
-        </p:spPr>
-        <p:txBody>
-          <a:bodyPr xmlns:a="http://schemas.openxmlformats.org/drawingml/2006/main" lIns="76200" tIns="38100" rIns="76200" bIns="38100" anchor="ctr"/>
-          <a:lstStyle xmlns:a="http://schemas.openxmlformats.org/drawingml/2006/main"/>
-          <a:p xmlns:a="http://schemas.openxmlformats.org/drawingml/2006/main">
-            <a:pPr algn="ctr">
-              <a:buNone/>
-              <a:defRPr sz="1350" b="1">
-                <a:solidFill>
-                  <a:srgbClr val="263746"/>
-                </a:solidFill>
-              </a:defRPr>
-            </a:pPr>
-            <a:r>
-              <a:rPr sz="1350" b="1">
-                <a:solidFill>
-                  <a:srgbClr val="263746"/>
-                </a:solidFill>
-                <a:latin typeface="Microsoft YaHei"/>
-                <a:ea typeface="Microsoft YaHei"/>
-                <a:cs typeface="Microsoft YaHei"/>
-              </a:rPr>
-              <a:t>生成候选与检索线索</a:t>
-            </a:r>
-          </a:p>
-        </p:txBody>
-      </p:sp>
-      <p:sp>
-        <p:nvSpPr>
-          <p:cNvPr id="31" name="p13-qn-1">
-            <a:extLst xmlns:a="http://schemas.openxmlformats.org/drawingml/2006/main">
-              <a:ext uri="{FF2B5EF4-FFF2-40B4-BE49-F238E27FC236}">
-                <a16:creationId xmlns:a16="http://schemas.microsoft.com/office/drawing/2014/main" id="{4A176C52-EAAD-4BCC-B864-30F05BE91DC2}"/>
-              </a:ext>
-            </a:extLst>
-          </p:cNvPr>
-          <p:cNvSpPr>
-            <a:spLocks xmlns:a="http://schemas.openxmlformats.org/drawingml/2006/main" noGrp="1"/>
-          </p:cNvSpPr>
-          <p:nvPr/>
-        </p:nvSpPr>
-        <p:spPr>
-          <a:xfrm xmlns:a="http://schemas.openxmlformats.org/drawingml/2006/main">
-            <a:off x="7848600" y="2228850"/>
-            <a:ext cx="400050" cy="400050"/>
+              <a:t>1</a:t>
+            </a:r>
+          </a:p>
+        </p:txBody>
+      </p:sp>
+      <p:sp>
+        <p:nvSpPr>
+          <p:cNvPr id="7" name="summary-16-heading-0">
+            <a:extLst xmlns:a="http://schemas.openxmlformats.org/drawingml/2006/main">
+              <a:ext uri="{FF2B5EF4-FFF2-40B4-BE49-F238E27FC236}">
+                <a16:creationId xmlns:a16="http://schemas.microsoft.com/office/drawing/2014/main" id="{8D9698F9-167D-436C-B6B1-4D5E27A4A3D5}"/>
+              </a:ext>
+            </a:extLst>
+          </p:cNvPr>
+          <p:cNvSpPr>
+            <a:spLocks xmlns:a="http://schemas.openxmlformats.org/drawingml/2006/main" noGrp="1"/>
+          </p:cNvSpPr>
+          <p:nvPr/>
+        </p:nvSpPr>
+        <p:spPr>
+          <a:xfrm xmlns:a="http://schemas.openxmlformats.org/drawingml/2006/main">
+            <a:off x="1028700" y="1162050"/>
+            <a:ext cx="2152650" cy="590550"/>
           </a:xfrm>
           <a:prstGeom xmlns:a="http://schemas.openxmlformats.org/drawingml/2006/main" prst="roundRect">
             <a:avLst>
-              <a:gd name="adj" fmla="val 19048"/>
+              <a:gd name="adj" fmla="val 12903"/>
             </a:avLst>
           </a:prstGeom>
           <a:solidFill xmlns:a="http://schemas.openxmlformats.org/drawingml/2006/main">
-            <a:srgbClr val="18354E"/>
-          </a:solidFill>
-          <a:ln xmlns:a="http://schemas.openxmlformats.org/drawingml/2006/main" w="0">
-            <a:noFill/>
-            <a:prstDash val="solid"/>
-          </a:ln>
-        </p:spPr>
-        <p:txBody>
-          <a:bodyPr xmlns:a="http://schemas.openxmlformats.org/drawingml/2006/main" lIns="76200" tIns="38100" rIns="76200" bIns="38100" anchor="ctr"/>
-          <a:lstStyle xmlns:a="http://schemas.openxmlformats.org/drawingml/2006/main"/>
-          <a:p xmlns:a="http://schemas.openxmlformats.org/drawingml/2006/main">
-            <a:pPr algn="ctr">
-              <a:buNone/>
-              <a:defRPr sz="1275" b="1">
+            <a:srgbClr val="E8F0F6"/>
+          </a:solidFill>
+          <a:ln xmlns:a="http://schemas.openxmlformats.org/drawingml/2006/main" w="0">
+            <a:noFill/>
+            <a:prstDash val="solid"/>
+          </a:ln>
+        </p:spPr>
+        <p:txBody>
+          <a:bodyPr xmlns:a="http://schemas.openxmlformats.org/drawingml/2006/main" lIns="76200" tIns="38100" rIns="76200" bIns="38100" anchor="ctr"/>
+          <a:lstStyle xmlns:a="http://schemas.openxmlformats.org/drawingml/2006/main"/>
+          <a:p xmlns:a="http://schemas.openxmlformats.org/drawingml/2006/main">
+            <a:pPr algn="ctr">
+              <a:lnSpc>
+                <a:spcPct val="112000"/>
+              </a:lnSpc>
+              <a:buNone/>
+              <a:defRPr sz="1725" b="1">
+                <a:solidFill>
+                  <a:srgbClr val="18354E"/>
+                </a:solidFill>
+              </a:defRPr>
+            </a:pPr>
+            <a:r>
+              <a:rPr sz="1725" b="1">
+                <a:solidFill>
+                  <a:srgbClr val="18354E"/>
+                </a:solidFill>
+                <a:latin typeface="Microsoft YaHei"/>
+                <a:ea typeface="Microsoft YaHei"/>
+                <a:cs typeface="Microsoft YaHei"/>
+              </a:rPr>
+              <a:t>完整闭环</a:t>
+            </a:r>
+          </a:p>
+        </p:txBody>
+      </p:sp>
+      <p:sp>
+        <p:nvSpPr>
+          <p:cNvPr id="8" name="summary-16-detail-0">
+            <a:extLst xmlns:a="http://schemas.openxmlformats.org/drawingml/2006/main">
+              <a:ext uri="{FF2B5EF4-FFF2-40B4-BE49-F238E27FC236}">
+                <a16:creationId xmlns:a16="http://schemas.microsoft.com/office/drawing/2014/main" id="{339F78F3-9036-49E5-8535-56689A9E0C3D}"/>
+              </a:ext>
+            </a:extLst>
+          </p:cNvPr>
+          <p:cNvSpPr>
+            <a:spLocks xmlns:a="http://schemas.openxmlformats.org/drawingml/2006/main" noGrp="1"/>
+          </p:cNvSpPr>
+          <p:nvPr/>
+        </p:nvSpPr>
+        <p:spPr>
+          <a:xfrm xmlns:a="http://schemas.openxmlformats.org/drawingml/2006/main">
+            <a:off x="457200" y="2095500"/>
+            <a:ext cx="2724150" cy="1676400"/>
+          </a:xfrm>
+          <a:prstGeom xmlns:a="http://schemas.openxmlformats.org/drawingml/2006/main" prst="roundRect">
+            <a:avLst>
+              <a:gd name="adj" fmla="val 4545"/>
+            </a:avLst>
+          </a:prstGeom>
+          <a:solidFill xmlns:a="http://schemas.openxmlformats.org/drawingml/2006/main">
+            <a:srgbClr val="FFFFFF"/>
+          </a:solidFill>
+          <a:ln xmlns:a="http://schemas.openxmlformats.org/drawingml/2006/main" w="9525">
+            <a:solidFill>
+              <a:srgbClr val="D6DDE2"/>
+            </a:solidFill>
+            <a:prstDash val="solid"/>
+          </a:ln>
+        </p:spPr>
+        <p:txBody>
+          <a:bodyPr xmlns:a="http://schemas.openxmlformats.org/drawingml/2006/main" lIns="76200" tIns="38100" rIns="76200" bIns="38100" anchor="ctr"/>
+          <a:lstStyle xmlns:a="http://schemas.openxmlformats.org/drawingml/2006/main"/>
+          <a:p xmlns:a="http://schemas.openxmlformats.org/drawingml/2006/main">
+            <a:pPr algn="ctr">
+              <a:lnSpc>
+                <a:spcPct val="116000"/>
+              </a:lnSpc>
+              <a:buNone/>
+              <a:defRPr sz="1500" b="1">
+                <a:solidFill>
+                  <a:srgbClr val="263746"/>
+                </a:solidFill>
+              </a:defRPr>
+            </a:pPr>
+            <a:r>
+              <a:rPr sz="1500" b="1">
+                <a:solidFill>
+                  <a:srgbClr val="263746"/>
+                </a:solidFill>
+                <a:latin typeface="Microsoft YaHei"/>
+                <a:ea typeface="Microsoft YaHei"/>
+                <a:cs typeface="Microsoft YaHei"/>
+              </a:rPr>
+              <a:t>问题、判断、验证与论证四个门能追溯到对应工件</a:t>
+            </a:r>
+          </a:p>
+        </p:txBody>
+      </p:sp>
+      <p:sp>
+        <p:nvSpPr>
+          <p:cNvPr id="9" name="summary-16-number-1">
+            <a:extLst xmlns:a="http://schemas.openxmlformats.org/drawingml/2006/main">
+              <a:ext uri="{FF2B5EF4-FFF2-40B4-BE49-F238E27FC236}">
+                <a16:creationId xmlns:a16="http://schemas.microsoft.com/office/drawing/2014/main" id="{1AFEAC0E-D692-45B4-B24F-61883841E272}"/>
+              </a:ext>
+            </a:extLst>
+          </p:cNvPr>
+          <p:cNvSpPr>
+            <a:spLocks xmlns:a="http://schemas.openxmlformats.org/drawingml/2006/main" noGrp="1"/>
+          </p:cNvSpPr>
+          <p:nvPr/>
+        </p:nvSpPr>
+        <p:spPr>
+          <a:xfrm xmlns:a="http://schemas.openxmlformats.org/drawingml/2006/main">
+            <a:off x="3371850" y="1219200"/>
+            <a:ext cx="476250" cy="476250"/>
+          </a:xfrm>
+          <a:prstGeom xmlns:a="http://schemas.openxmlformats.org/drawingml/2006/main" prst="roundRect">
+            <a:avLst>
+              <a:gd name="adj" fmla="val 16000"/>
+            </a:avLst>
+          </a:prstGeom>
+          <a:solidFill xmlns:a="http://schemas.openxmlformats.org/drawingml/2006/main">
+            <a:srgbClr val="28745A"/>
+          </a:solidFill>
+          <a:ln xmlns:a="http://schemas.openxmlformats.org/drawingml/2006/main" w="0">
+            <a:noFill/>
+            <a:prstDash val="solid"/>
+          </a:ln>
+        </p:spPr>
+        <p:txBody>
+          <a:bodyPr xmlns:a="http://schemas.openxmlformats.org/drawingml/2006/main" lIns="76200" tIns="38100" rIns="76200" bIns="38100" anchor="ctr"/>
+          <a:lstStyle xmlns:a="http://schemas.openxmlformats.org/drawingml/2006/main"/>
+          <a:p xmlns:a="http://schemas.openxmlformats.org/drawingml/2006/main">
+            <a:pPr algn="ctr">
+              <a:lnSpc>
+                <a:spcPct val="112000"/>
+              </a:lnSpc>
+              <a:buNone/>
+              <a:defRPr sz="1500" b="1">
                 <a:solidFill>
                   <a:srgbClr val="FFFFFF"/>
                 </a:solidFill>
               </a:defRPr>
             </a:pPr>
             <a:r>
-              <a:rPr sz="1275" b="1">
+              <a:rPr sz="1500" b="1">
                 <a:solidFill>
                   <a:srgbClr val="FFFFFF"/>
                 </a:solidFill>
@@ -17858,113 +16542,184 @@
                 <a:ea typeface="Arial"/>
                 <a:cs typeface="Arial"/>
               </a:rPr>
-              <a:t>II</a:t>
-            </a:r>
-          </a:p>
-        </p:txBody>
-      </p:sp>
-      <p:sp>
-        <p:nvSpPr>
-          <p:cNvPr id="32" name="p13-q-1">
-            <a:extLst xmlns:a="http://schemas.openxmlformats.org/drawingml/2006/main">
-              <a:ext uri="{FF2B5EF4-FFF2-40B4-BE49-F238E27FC236}">
-                <a16:creationId xmlns:a16="http://schemas.microsoft.com/office/drawing/2014/main" id="{FC67B32A-CE35-4B19-8B2E-8A8D39C50579}"/>
-              </a:ext>
-            </a:extLst>
-          </p:cNvPr>
-          <p:cNvSpPr>
-            <a:spLocks xmlns:a="http://schemas.openxmlformats.org/drawingml/2006/main" noGrp="1"/>
-          </p:cNvSpPr>
-          <p:nvPr/>
-        </p:nvSpPr>
-        <p:spPr>
-          <a:xfrm xmlns:a="http://schemas.openxmlformats.org/drawingml/2006/main">
-            <a:off x="8343900" y="2228850"/>
-            <a:ext cx="3048000" cy="400050"/>
-          </a:xfrm>
-          <a:prstGeom xmlns:a="http://schemas.openxmlformats.org/drawingml/2006/main" prst="rect">
-            <a:avLst/>
-          </a:prstGeom>
-          <a:solidFill xmlns:a="http://schemas.openxmlformats.org/drawingml/2006/main">
-            <a:srgbClr val="E8F0F6"/>
-          </a:solidFill>
-          <a:ln xmlns:a="http://schemas.openxmlformats.org/drawingml/2006/main" w="0">
-            <a:noFill/>
-            <a:prstDash val="solid"/>
-          </a:ln>
-        </p:spPr>
-        <p:txBody>
-          <a:bodyPr xmlns:a="http://schemas.openxmlformats.org/drawingml/2006/main" lIns="76200" tIns="38100" rIns="76200" bIns="38100" anchor="ctr"/>
-          <a:lstStyle xmlns:a="http://schemas.openxmlformats.org/drawingml/2006/main"/>
-          <a:p xmlns:a="http://schemas.openxmlformats.org/drawingml/2006/main">
-            <a:pPr algn="ctr">
-              <a:buNone/>
-              <a:defRPr sz="1350" b="1">
-                <a:solidFill>
-                  <a:srgbClr val="263746"/>
-                </a:solidFill>
-              </a:defRPr>
-            </a:pPr>
-            <a:r>
-              <a:rPr sz="1350" b="1">
-                <a:solidFill>
-                  <a:srgbClr val="263746"/>
-                </a:solidFill>
-                <a:latin typeface="Microsoft YaHei"/>
-                <a:ea typeface="Microsoft YaHei"/>
-                <a:cs typeface="Microsoft YaHei"/>
-              </a:rPr>
-              <a:t>结构化与重复执行</a:t>
-            </a:r>
-          </a:p>
-        </p:txBody>
-      </p:sp>
-      <p:sp>
-        <p:nvSpPr>
-          <p:cNvPr id="33" name="p13-qn-2">
-            <a:extLst xmlns:a="http://schemas.openxmlformats.org/drawingml/2006/main">
-              <a:ext uri="{FF2B5EF4-FFF2-40B4-BE49-F238E27FC236}">
-                <a16:creationId xmlns:a16="http://schemas.microsoft.com/office/drawing/2014/main" id="{1386AD79-9776-4CFE-AABB-8D8BB12EFCF8}"/>
-              </a:ext>
-            </a:extLst>
-          </p:cNvPr>
-          <p:cNvSpPr>
-            <a:spLocks xmlns:a="http://schemas.openxmlformats.org/drawingml/2006/main" noGrp="1"/>
-          </p:cNvSpPr>
-          <p:nvPr/>
-        </p:nvSpPr>
-        <p:spPr>
-          <a:xfrm xmlns:a="http://schemas.openxmlformats.org/drawingml/2006/main">
-            <a:off x="7848600" y="2895600"/>
-            <a:ext cx="400050" cy="400050"/>
+              <a:t>2</a:t>
+            </a:r>
+          </a:p>
+        </p:txBody>
+      </p:sp>
+      <p:sp>
+        <p:nvSpPr>
+          <p:cNvPr id="10" name="summary-16-heading-1">
+            <a:extLst xmlns:a="http://schemas.openxmlformats.org/drawingml/2006/main">
+              <a:ext uri="{FF2B5EF4-FFF2-40B4-BE49-F238E27FC236}">
+                <a16:creationId xmlns:a16="http://schemas.microsoft.com/office/drawing/2014/main" id="{360CE0AE-DBF8-41BA-8630-3E6B7D955CCF}"/>
+              </a:ext>
+            </a:extLst>
+          </p:cNvPr>
+          <p:cNvSpPr>
+            <a:spLocks xmlns:a="http://schemas.openxmlformats.org/drawingml/2006/main" noGrp="1"/>
+          </p:cNvSpPr>
+          <p:nvPr/>
+        </p:nvSpPr>
+        <p:spPr>
+          <a:xfrm xmlns:a="http://schemas.openxmlformats.org/drawingml/2006/main">
+            <a:off x="3943350" y="1162050"/>
+            <a:ext cx="2152650" cy="590550"/>
           </a:xfrm>
           <a:prstGeom xmlns:a="http://schemas.openxmlformats.org/drawingml/2006/main" prst="roundRect">
             <a:avLst>
-              <a:gd name="adj" fmla="val 19048"/>
+              <a:gd name="adj" fmla="val 12903"/>
             </a:avLst>
           </a:prstGeom>
           <a:solidFill xmlns:a="http://schemas.openxmlformats.org/drawingml/2006/main">
-            <a:srgbClr val="18354E"/>
-          </a:solidFill>
-          <a:ln xmlns:a="http://schemas.openxmlformats.org/drawingml/2006/main" w="0">
-            <a:noFill/>
-            <a:prstDash val="solid"/>
-          </a:ln>
-        </p:spPr>
-        <p:txBody>
-          <a:bodyPr xmlns:a="http://schemas.openxmlformats.org/drawingml/2006/main" lIns="76200" tIns="38100" rIns="76200" bIns="38100" anchor="ctr"/>
-          <a:lstStyle xmlns:a="http://schemas.openxmlformats.org/drawingml/2006/main"/>
-          <a:p xmlns:a="http://schemas.openxmlformats.org/drawingml/2006/main">
-            <a:pPr algn="ctr">
-              <a:buNone/>
-              <a:defRPr sz="1275" b="1">
+            <a:srgbClr val="E7F2ED"/>
+          </a:solidFill>
+          <a:ln xmlns:a="http://schemas.openxmlformats.org/drawingml/2006/main" w="0">
+            <a:noFill/>
+            <a:prstDash val="solid"/>
+          </a:ln>
+        </p:spPr>
+        <p:txBody>
+          <a:bodyPr xmlns:a="http://schemas.openxmlformats.org/drawingml/2006/main" lIns="76200" tIns="38100" rIns="76200" bIns="38100" anchor="ctr"/>
+          <a:lstStyle xmlns:a="http://schemas.openxmlformats.org/drawingml/2006/main"/>
+          <a:p xmlns:a="http://schemas.openxmlformats.org/drawingml/2006/main">
+            <a:pPr algn="ctr">
+              <a:lnSpc>
+                <a:spcPct val="112000"/>
+              </a:lnSpc>
+              <a:buNone/>
+              <a:defRPr sz="1725" b="1">
+                <a:solidFill>
+                  <a:srgbClr val="28745A"/>
+                </a:solidFill>
+              </a:defRPr>
+            </a:pPr>
+            <a:r>
+              <a:rPr sz="1725" b="1">
+                <a:solidFill>
+                  <a:srgbClr val="28745A"/>
+                </a:solidFill>
+                <a:latin typeface="Microsoft YaHei"/>
+                <a:ea typeface="Microsoft YaHei"/>
+                <a:cs typeface="Microsoft YaHei"/>
+              </a:rPr>
+              <a:t>可审计工作流</a:t>
+            </a:r>
+          </a:p>
+        </p:txBody>
+      </p:sp>
+      <p:sp>
+        <p:nvSpPr>
+          <p:cNvPr id="11" name="summary-16-detail-1">
+            <a:extLst xmlns:a="http://schemas.openxmlformats.org/drawingml/2006/main">
+              <a:ext uri="{FF2B5EF4-FFF2-40B4-BE49-F238E27FC236}">
+                <a16:creationId xmlns:a16="http://schemas.microsoft.com/office/drawing/2014/main" id="{798DB1C4-9A49-4348-AD89-BCD6CF1D05E2}"/>
+              </a:ext>
+            </a:extLst>
+          </p:cNvPr>
+          <p:cNvSpPr>
+            <a:spLocks xmlns:a="http://schemas.openxmlformats.org/drawingml/2006/main" noGrp="1"/>
+          </p:cNvSpPr>
+          <p:nvPr/>
+        </p:nvSpPr>
+        <p:spPr>
+          <a:xfrm xmlns:a="http://schemas.openxmlformats.org/drawingml/2006/main">
+            <a:off x="3371850" y="2095500"/>
+            <a:ext cx="2724150" cy="1676400"/>
+          </a:xfrm>
+          <a:prstGeom xmlns:a="http://schemas.openxmlformats.org/drawingml/2006/main" prst="roundRect">
+            <a:avLst>
+              <a:gd name="adj" fmla="val 4545"/>
+            </a:avLst>
+          </a:prstGeom>
+          <a:solidFill xmlns:a="http://schemas.openxmlformats.org/drawingml/2006/main">
+            <a:srgbClr val="FFFFFF"/>
+          </a:solidFill>
+          <a:ln xmlns:a="http://schemas.openxmlformats.org/drawingml/2006/main" w="9525">
+            <a:solidFill>
+              <a:srgbClr val="D6DDE2"/>
+            </a:solidFill>
+            <a:prstDash val="solid"/>
+          </a:ln>
+        </p:spPr>
+        <p:txBody>
+          <a:bodyPr xmlns:a="http://schemas.openxmlformats.org/drawingml/2006/main" lIns="76200" tIns="38100" rIns="76200" bIns="38100" anchor="ctr"/>
+          <a:lstStyle xmlns:a="http://schemas.openxmlformats.org/drawingml/2006/main"/>
+          <a:p xmlns:a="http://schemas.openxmlformats.org/drawingml/2006/main">
+            <a:pPr algn="ctr">
+              <a:lnSpc>
+                <a:spcPct val="116000"/>
+              </a:lnSpc>
+              <a:buNone/>
+              <a:defRPr sz="1500" b="1">
+                <a:solidFill>
+                  <a:srgbClr val="263746"/>
+                </a:solidFill>
+              </a:defRPr>
+            </a:pPr>
+            <a:r>
+              <a:rPr sz="1500" b="1">
+                <a:solidFill>
+                  <a:srgbClr val="263746"/>
+                </a:solidFill>
+                <a:latin typeface="Microsoft YaHei"/>
+                <a:ea typeface="Microsoft YaHei"/>
+                <a:cs typeface="Microsoft YaHei"/>
+              </a:rPr>
+              <a:t>任务契约、权限、trace、评价与人工审核可复核</a:t>
+            </a:r>
+          </a:p>
+        </p:txBody>
+      </p:sp>
+      <p:sp>
+        <p:nvSpPr>
+          <p:cNvPr id="12" name="summary-16-number-2">
+            <a:extLst xmlns:a="http://schemas.openxmlformats.org/drawingml/2006/main">
+              <a:ext uri="{FF2B5EF4-FFF2-40B4-BE49-F238E27FC236}">
+                <a16:creationId xmlns:a16="http://schemas.microsoft.com/office/drawing/2014/main" id="{9D73376C-B752-44D2-BB1C-EE9A3482836D}"/>
+              </a:ext>
+            </a:extLst>
+          </p:cNvPr>
+          <p:cNvSpPr>
+            <a:spLocks xmlns:a="http://schemas.openxmlformats.org/drawingml/2006/main" noGrp="1"/>
+          </p:cNvSpPr>
+          <p:nvPr/>
+        </p:nvSpPr>
+        <p:spPr>
+          <a:xfrm xmlns:a="http://schemas.openxmlformats.org/drawingml/2006/main">
+            <a:off x="6286500" y="1219200"/>
+            <a:ext cx="476250" cy="476250"/>
+          </a:xfrm>
+          <a:prstGeom xmlns:a="http://schemas.openxmlformats.org/drawingml/2006/main" prst="roundRect">
+            <a:avLst>
+              <a:gd name="adj" fmla="val 16000"/>
+            </a:avLst>
+          </a:prstGeom>
+          <a:solidFill xmlns:a="http://schemas.openxmlformats.org/drawingml/2006/main">
+            <a:srgbClr val="C8161E"/>
+          </a:solidFill>
+          <a:ln xmlns:a="http://schemas.openxmlformats.org/drawingml/2006/main" w="0">
+            <a:noFill/>
+            <a:prstDash val="solid"/>
+          </a:ln>
+        </p:spPr>
+        <p:txBody>
+          <a:bodyPr xmlns:a="http://schemas.openxmlformats.org/drawingml/2006/main" lIns="76200" tIns="38100" rIns="76200" bIns="38100" anchor="ctr"/>
+          <a:lstStyle xmlns:a="http://schemas.openxmlformats.org/drawingml/2006/main"/>
+          <a:p xmlns:a="http://schemas.openxmlformats.org/drawingml/2006/main">
+            <a:pPr algn="ctr">
+              <a:lnSpc>
+                <a:spcPct val="112000"/>
+              </a:lnSpc>
+              <a:buNone/>
+              <a:defRPr sz="1500" b="1">
                 <a:solidFill>
                   <a:srgbClr val="FFFFFF"/>
                 </a:solidFill>
               </a:defRPr>
             </a:pPr>
             <a:r>
-              <a:rPr sz="1275" b="1">
+              <a:rPr sz="1500" b="1">
                 <a:solidFill>
                   <a:srgbClr val="FFFFFF"/>
                 </a:solidFill>
@@ -17972,113 +16727,184 @@
                 <a:ea typeface="Arial"/>
                 <a:cs typeface="Arial"/>
               </a:rPr>
-              <a:t>III</a:t>
-            </a:r>
-          </a:p>
-        </p:txBody>
-      </p:sp>
-      <p:sp>
-        <p:nvSpPr>
-          <p:cNvPr id="34" name="p13-q-2">
-            <a:extLst xmlns:a="http://schemas.openxmlformats.org/drawingml/2006/main">
-              <a:ext uri="{FF2B5EF4-FFF2-40B4-BE49-F238E27FC236}">
-                <a16:creationId xmlns:a16="http://schemas.microsoft.com/office/drawing/2014/main" id="{6ACE417E-7F8D-4FFA-9B73-2768D500A67B}"/>
-              </a:ext>
-            </a:extLst>
-          </p:cNvPr>
-          <p:cNvSpPr>
-            <a:spLocks xmlns:a="http://schemas.openxmlformats.org/drawingml/2006/main" noGrp="1"/>
-          </p:cNvSpPr>
-          <p:nvPr/>
-        </p:nvSpPr>
-        <p:spPr>
-          <a:xfrm xmlns:a="http://schemas.openxmlformats.org/drawingml/2006/main">
-            <a:off x="8343900" y="2895600"/>
-            <a:ext cx="3048000" cy="400050"/>
-          </a:xfrm>
-          <a:prstGeom xmlns:a="http://schemas.openxmlformats.org/drawingml/2006/main" prst="rect">
-            <a:avLst/>
-          </a:prstGeom>
-          <a:solidFill xmlns:a="http://schemas.openxmlformats.org/drawingml/2006/main">
-            <a:srgbClr val="E8F0F6"/>
-          </a:solidFill>
-          <a:ln xmlns:a="http://schemas.openxmlformats.org/drawingml/2006/main" w="0">
-            <a:noFill/>
-            <a:prstDash val="solid"/>
-          </a:ln>
-        </p:spPr>
-        <p:txBody>
-          <a:bodyPr xmlns:a="http://schemas.openxmlformats.org/drawingml/2006/main" lIns="76200" tIns="38100" rIns="76200" bIns="38100" anchor="ctr"/>
-          <a:lstStyle xmlns:a="http://schemas.openxmlformats.org/drawingml/2006/main"/>
-          <a:p xmlns:a="http://schemas.openxmlformats.org/drawingml/2006/main">
-            <a:pPr algn="ctr">
-              <a:buNone/>
-              <a:defRPr sz="1350" b="1">
-                <a:solidFill>
-                  <a:srgbClr val="263746"/>
-                </a:solidFill>
-              </a:defRPr>
-            </a:pPr>
-            <a:r>
-              <a:rPr sz="1350" b="1">
-                <a:solidFill>
-                  <a:srgbClr val="263746"/>
-                </a:solidFill>
-                <a:latin typeface="Microsoft YaHei"/>
-                <a:ea typeface="Microsoft YaHei"/>
-                <a:cs typeface="Microsoft YaHei"/>
-              </a:rPr>
-              <a:t>对比、审计与提醒</a:t>
-            </a:r>
-          </a:p>
-        </p:txBody>
-      </p:sp>
-      <p:sp>
-        <p:nvSpPr>
-          <p:cNvPr id="35" name="p13-qn-3">
-            <a:extLst xmlns:a="http://schemas.openxmlformats.org/drawingml/2006/main">
-              <a:ext uri="{FF2B5EF4-FFF2-40B4-BE49-F238E27FC236}">
-                <a16:creationId xmlns:a16="http://schemas.microsoft.com/office/drawing/2014/main" id="{4DC6410A-C799-4406-852C-E3EC1B654938}"/>
-              </a:ext>
-            </a:extLst>
-          </p:cNvPr>
-          <p:cNvSpPr>
-            <a:spLocks xmlns:a="http://schemas.openxmlformats.org/drawingml/2006/main" noGrp="1"/>
-          </p:cNvSpPr>
-          <p:nvPr/>
-        </p:nvSpPr>
-        <p:spPr>
-          <a:xfrm xmlns:a="http://schemas.openxmlformats.org/drawingml/2006/main">
-            <a:off x="7848600" y="3562350"/>
-            <a:ext cx="400050" cy="400050"/>
+              <a:t>3</a:t>
+            </a:r>
+          </a:p>
+        </p:txBody>
+      </p:sp>
+      <p:sp>
+        <p:nvSpPr>
+          <p:cNvPr id="13" name="summary-16-heading-2">
+            <a:extLst xmlns:a="http://schemas.openxmlformats.org/drawingml/2006/main">
+              <a:ext uri="{FF2B5EF4-FFF2-40B4-BE49-F238E27FC236}">
+                <a16:creationId xmlns:a16="http://schemas.microsoft.com/office/drawing/2014/main" id="{109372EC-6407-4BB9-8A36-7E1DA51C5509}"/>
+              </a:ext>
+            </a:extLst>
+          </p:cNvPr>
+          <p:cNvSpPr>
+            <a:spLocks xmlns:a="http://schemas.openxmlformats.org/drawingml/2006/main" noGrp="1"/>
+          </p:cNvSpPr>
+          <p:nvPr/>
+        </p:nvSpPr>
+        <p:spPr>
+          <a:xfrm xmlns:a="http://schemas.openxmlformats.org/drawingml/2006/main">
+            <a:off x="6858000" y="1162050"/>
+            <a:ext cx="2152650" cy="590550"/>
           </a:xfrm>
           <a:prstGeom xmlns:a="http://schemas.openxmlformats.org/drawingml/2006/main" prst="roundRect">
             <a:avLst>
-              <a:gd name="adj" fmla="val 19048"/>
+              <a:gd name="adj" fmla="val 12903"/>
             </a:avLst>
           </a:prstGeom>
           <a:solidFill xmlns:a="http://schemas.openxmlformats.org/drawingml/2006/main">
-            <a:srgbClr val="C8161E"/>
-          </a:solidFill>
-          <a:ln xmlns:a="http://schemas.openxmlformats.org/drawingml/2006/main" w="0">
-            <a:noFill/>
-            <a:prstDash val="solid"/>
-          </a:ln>
-        </p:spPr>
-        <p:txBody>
-          <a:bodyPr xmlns:a="http://schemas.openxmlformats.org/drawingml/2006/main" lIns="76200" tIns="38100" rIns="76200" bIns="38100" anchor="ctr"/>
-          <a:lstStyle xmlns:a="http://schemas.openxmlformats.org/drawingml/2006/main"/>
-          <a:p xmlns:a="http://schemas.openxmlformats.org/drawingml/2006/main">
-            <a:pPr algn="ctr">
-              <a:buNone/>
-              <a:defRPr sz="1275" b="1">
+            <a:srgbClr val="F8E9EA"/>
+          </a:solidFill>
+          <a:ln xmlns:a="http://schemas.openxmlformats.org/drawingml/2006/main" w="0">
+            <a:noFill/>
+            <a:prstDash val="solid"/>
+          </a:ln>
+        </p:spPr>
+        <p:txBody>
+          <a:bodyPr xmlns:a="http://schemas.openxmlformats.org/drawingml/2006/main" lIns="76200" tIns="38100" rIns="76200" bIns="38100" anchor="ctr"/>
+          <a:lstStyle xmlns:a="http://schemas.openxmlformats.org/drawingml/2006/main"/>
+          <a:p xmlns:a="http://schemas.openxmlformats.org/drawingml/2006/main">
+            <a:pPr algn="ctr">
+              <a:lnSpc>
+                <a:spcPct val="112000"/>
+              </a:lnSpc>
+              <a:buNone/>
+              <a:defRPr sz="1725" b="1">
+                <a:solidFill>
+                  <a:srgbClr val="C8161E"/>
+                </a:solidFill>
+              </a:defRPr>
+            </a:pPr>
+            <a:r>
+              <a:rPr sz="1725" b="1">
+                <a:solidFill>
+                  <a:srgbClr val="C8161E"/>
+                </a:solidFill>
+                <a:latin typeface="Microsoft YaHei"/>
+                <a:ea typeface="Microsoft YaHei"/>
+                <a:cs typeface="Microsoft YaHei"/>
+              </a:rPr>
+              <a:t>结论边界</a:t>
+            </a:r>
+          </a:p>
+        </p:txBody>
+      </p:sp>
+      <p:sp>
+        <p:nvSpPr>
+          <p:cNvPr id="14" name="summary-16-detail-2">
+            <a:extLst xmlns:a="http://schemas.openxmlformats.org/drawingml/2006/main">
+              <a:ext uri="{FF2B5EF4-FFF2-40B4-BE49-F238E27FC236}">
+                <a16:creationId xmlns:a16="http://schemas.microsoft.com/office/drawing/2014/main" id="{4D42F5FB-8011-4F04-A9E8-91B3EACB97FB}"/>
+              </a:ext>
+            </a:extLst>
+          </p:cNvPr>
+          <p:cNvSpPr>
+            <a:spLocks xmlns:a="http://schemas.openxmlformats.org/drawingml/2006/main" noGrp="1"/>
+          </p:cNvSpPr>
+          <p:nvPr/>
+        </p:nvSpPr>
+        <p:spPr>
+          <a:xfrm xmlns:a="http://schemas.openxmlformats.org/drawingml/2006/main">
+            <a:off x="6286500" y="2095500"/>
+            <a:ext cx="2724150" cy="1676400"/>
+          </a:xfrm>
+          <a:prstGeom xmlns:a="http://schemas.openxmlformats.org/drawingml/2006/main" prst="roundRect">
+            <a:avLst>
+              <a:gd name="adj" fmla="val 4545"/>
+            </a:avLst>
+          </a:prstGeom>
+          <a:solidFill xmlns:a="http://schemas.openxmlformats.org/drawingml/2006/main">
+            <a:srgbClr val="FFFFFF"/>
+          </a:solidFill>
+          <a:ln xmlns:a="http://schemas.openxmlformats.org/drawingml/2006/main" w="9525">
+            <a:solidFill>
+              <a:srgbClr val="D6DDE2"/>
+            </a:solidFill>
+            <a:prstDash val="solid"/>
+          </a:ln>
+        </p:spPr>
+        <p:txBody>
+          <a:bodyPr xmlns:a="http://schemas.openxmlformats.org/drawingml/2006/main" lIns="76200" tIns="38100" rIns="76200" bIns="38100" anchor="ctr"/>
+          <a:lstStyle xmlns:a="http://schemas.openxmlformats.org/drawingml/2006/main"/>
+          <a:p xmlns:a="http://schemas.openxmlformats.org/drawingml/2006/main">
+            <a:pPr algn="ctr">
+              <a:lnSpc>
+                <a:spcPct val="116000"/>
+              </a:lnSpc>
+              <a:buNone/>
+              <a:defRPr sz="1500" b="1">
+                <a:solidFill>
+                  <a:srgbClr val="263746"/>
+                </a:solidFill>
+              </a:defRPr>
+            </a:pPr>
+            <a:r>
+              <a:rPr sz="1500" b="1">
+                <a:solidFill>
+                  <a:srgbClr val="263746"/>
+                </a:solidFill>
+                <a:latin typeface="Microsoft YaHei"/>
+                <a:ea typeface="Microsoft YaHei"/>
+                <a:cs typeface="Microsoft YaHei"/>
+              </a:rPr>
+              <a:t>正向、负向与失败结果共同限定允许主张</a:t>
+            </a:r>
+          </a:p>
+        </p:txBody>
+      </p:sp>
+      <p:sp>
+        <p:nvSpPr>
+          <p:cNvPr id="15" name="summary-16-number-3">
+            <a:extLst xmlns:a="http://schemas.openxmlformats.org/drawingml/2006/main">
+              <a:ext uri="{FF2B5EF4-FFF2-40B4-BE49-F238E27FC236}">
+                <a16:creationId xmlns:a16="http://schemas.microsoft.com/office/drawing/2014/main" id="{672191FC-C95E-4D80-AA23-185400866C3B}"/>
+              </a:ext>
+            </a:extLst>
+          </p:cNvPr>
+          <p:cNvSpPr>
+            <a:spLocks xmlns:a="http://schemas.openxmlformats.org/drawingml/2006/main" noGrp="1"/>
+          </p:cNvSpPr>
+          <p:nvPr/>
+        </p:nvSpPr>
+        <p:spPr>
+          <a:xfrm xmlns:a="http://schemas.openxmlformats.org/drawingml/2006/main">
+            <a:off x="9201150" y="1219200"/>
+            <a:ext cx="476250" cy="476250"/>
+          </a:xfrm>
+          <a:prstGeom xmlns:a="http://schemas.openxmlformats.org/drawingml/2006/main" prst="roundRect">
+            <a:avLst>
+              <a:gd name="adj" fmla="val 16000"/>
+            </a:avLst>
+          </a:prstGeom>
+          <a:solidFill xmlns:a="http://schemas.openxmlformats.org/drawingml/2006/main">
+            <a:srgbClr val="A86C12"/>
+          </a:solidFill>
+          <a:ln xmlns:a="http://schemas.openxmlformats.org/drawingml/2006/main" w="0">
+            <a:noFill/>
+            <a:prstDash val="solid"/>
+          </a:ln>
+        </p:spPr>
+        <p:txBody>
+          <a:bodyPr xmlns:a="http://schemas.openxmlformats.org/drawingml/2006/main" lIns="76200" tIns="38100" rIns="76200" bIns="38100" anchor="ctr"/>
+          <a:lstStyle xmlns:a="http://schemas.openxmlformats.org/drawingml/2006/main"/>
+          <a:p xmlns:a="http://schemas.openxmlformats.org/drawingml/2006/main">
+            <a:pPr algn="ctr">
+              <a:lnSpc>
+                <a:spcPct val="112000"/>
+              </a:lnSpc>
+              <a:buNone/>
+              <a:defRPr sz="1500" b="1">
                 <a:solidFill>
                   <a:srgbClr val="FFFFFF"/>
                 </a:solidFill>
               </a:defRPr>
             </a:pPr>
             <a:r>
-              <a:rPr sz="1275" b="1">
+              <a:rPr sz="1500" b="1">
                 <a:solidFill>
                   <a:srgbClr val="FFFFFF"/>
                 </a:solidFill>
@@ -18086,169 +16912,123 @@
                 <a:ea typeface="Arial"/>
                 <a:cs typeface="Arial"/>
               </a:rPr>
-              <a:t>IV</a:t>
-            </a:r>
-          </a:p>
-        </p:txBody>
-      </p:sp>
-      <p:sp>
-        <p:nvSpPr>
-          <p:cNvPr id="36" name="p13-q-3">
-            <a:extLst xmlns:a="http://schemas.openxmlformats.org/drawingml/2006/main">
-              <a:ext uri="{FF2B5EF4-FFF2-40B4-BE49-F238E27FC236}">
-                <a16:creationId xmlns:a16="http://schemas.microsoft.com/office/drawing/2014/main" id="{3E1A1370-B524-4B75-9998-8B60C658BA9D}"/>
-              </a:ext>
-            </a:extLst>
-          </p:cNvPr>
-          <p:cNvSpPr>
-            <a:spLocks xmlns:a="http://schemas.openxmlformats.org/drawingml/2006/main" noGrp="1"/>
-          </p:cNvSpPr>
-          <p:nvPr/>
-        </p:nvSpPr>
-        <p:spPr>
-          <a:xfrm xmlns:a="http://schemas.openxmlformats.org/drawingml/2006/main">
-            <a:off x="8343900" y="3562350"/>
-            <a:ext cx="3048000" cy="400050"/>
-          </a:xfrm>
-          <a:prstGeom xmlns:a="http://schemas.openxmlformats.org/drawingml/2006/main" prst="rect">
-            <a:avLst/>
-          </a:prstGeom>
-          <a:solidFill xmlns:a="http://schemas.openxmlformats.org/drawingml/2006/main">
-            <a:srgbClr val="F8E9EA"/>
-          </a:solidFill>
-          <a:ln xmlns:a="http://schemas.openxmlformats.org/drawingml/2006/main" w="0">
-            <a:noFill/>
-            <a:prstDash val="solid"/>
-          </a:ln>
-        </p:spPr>
-        <p:txBody>
-          <a:bodyPr xmlns:a="http://schemas.openxmlformats.org/drawingml/2006/main" lIns="76200" tIns="38100" rIns="76200" bIns="38100" anchor="ctr"/>
-          <a:lstStyle xmlns:a="http://schemas.openxmlformats.org/drawingml/2006/main"/>
-          <a:p xmlns:a="http://schemas.openxmlformats.org/drawingml/2006/main">
-            <a:pPr algn="ctr">
-              <a:buNone/>
-              <a:defRPr sz="1350" b="1">
-                <a:solidFill>
-                  <a:srgbClr val="263746"/>
-                </a:solidFill>
-              </a:defRPr>
-            </a:pPr>
-            <a:r>
-              <a:rPr sz="1350" b="1">
-                <a:solidFill>
-                  <a:srgbClr val="263746"/>
-                </a:solidFill>
-                <a:latin typeface="Microsoft YaHei"/>
-                <a:ea typeface="Microsoft YaHei"/>
-                <a:cs typeface="Microsoft YaHei"/>
-              </a:rPr>
-              <a:t>表达、格式与压缩</a:t>
-            </a:r>
-          </a:p>
-        </p:txBody>
-      </p:sp>
-      <p:sp>
-        <p:nvSpPr>
-          <p:cNvPr id="37" name="p13-qn-4">
-            <a:extLst xmlns:a="http://schemas.openxmlformats.org/drawingml/2006/main">
-              <a:ext uri="{FF2B5EF4-FFF2-40B4-BE49-F238E27FC236}">
-                <a16:creationId xmlns:a16="http://schemas.microsoft.com/office/drawing/2014/main" id="{7B24AA40-CC08-481E-BD00-B2ACC1C0C084}"/>
-              </a:ext>
-            </a:extLst>
-          </p:cNvPr>
-          <p:cNvSpPr>
-            <a:spLocks xmlns:a="http://schemas.openxmlformats.org/drawingml/2006/main" noGrp="1"/>
-          </p:cNvSpPr>
-          <p:nvPr/>
-        </p:nvSpPr>
-        <p:spPr>
-          <a:xfrm xmlns:a="http://schemas.openxmlformats.org/drawingml/2006/main">
-            <a:off x="7848600" y="4229100"/>
-            <a:ext cx="400050" cy="400050"/>
+              <a:t>4</a:t>
+            </a:r>
+          </a:p>
+        </p:txBody>
+      </p:sp>
+      <p:sp>
+        <p:nvSpPr>
+          <p:cNvPr id="16" name="summary-16-heading-3">
+            <a:extLst xmlns:a="http://schemas.openxmlformats.org/drawingml/2006/main">
+              <a:ext uri="{FF2B5EF4-FFF2-40B4-BE49-F238E27FC236}">
+                <a16:creationId xmlns:a16="http://schemas.microsoft.com/office/drawing/2014/main" id="{7621FCBC-0C53-46EE-AFA8-753C9FC96A27}"/>
+              </a:ext>
+            </a:extLst>
+          </p:cNvPr>
+          <p:cNvSpPr>
+            <a:spLocks xmlns:a="http://schemas.openxmlformats.org/drawingml/2006/main" noGrp="1"/>
+          </p:cNvSpPr>
+          <p:nvPr/>
+        </p:nvSpPr>
+        <p:spPr>
+          <a:xfrm xmlns:a="http://schemas.openxmlformats.org/drawingml/2006/main">
+            <a:off x="9772650" y="1162050"/>
+            <a:ext cx="2152650" cy="590550"/>
           </a:xfrm>
           <a:prstGeom xmlns:a="http://schemas.openxmlformats.org/drawingml/2006/main" prst="roundRect">
             <a:avLst>
-              <a:gd name="adj" fmla="val 19048"/>
+              <a:gd name="adj" fmla="val 12903"/>
             </a:avLst>
           </a:prstGeom>
           <a:solidFill xmlns:a="http://schemas.openxmlformats.org/drawingml/2006/main">
-            <a:srgbClr val="18354E"/>
-          </a:solidFill>
-          <a:ln xmlns:a="http://schemas.openxmlformats.org/drawingml/2006/main" w="0">
-            <a:noFill/>
-            <a:prstDash val="solid"/>
-          </a:ln>
-        </p:spPr>
-        <p:txBody>
-          <a:bodyPr xmlns:a="http://schemas.openxmlformats.org/drawingml/2006/main" lIns="76200" tIns="38100" rIns="76200" bIns="38100" anchor="ctr"/>
-          <a:lstStyle xmlns:a="http://schemas.openxmlformats.org/drawingml/2006/main"/>
-          <a:p xmlns:a="http://schemas.openxmlformats.org/drawingml/2006/main">
-            <a:pPr algn="ctr">
-              <a:buNone/>
-              <a:defRPr sz="1275" b="1">
-                <a:solidFill>
-                  <a:srgbClr val="FFFFFF"/>
-                </a:solidFill>
-              </a:defRPr>
-            </a:pPr>
-            <a:r>
-              <a:rPr sz="1275" b="1">
-                <a:solidFill>
-                  <a:srgbClr val="FFFFFF"/>
-                </a:solidFill>
-                <a:latin typeface="Arial"/>
-                <a:ea typeface="Arial"/>
-                <a:cs typeface="Arial"/>
-              </a:rPr>
-              <a:t>人</a:t>
-            </a:r>
-          </a:p>
-        </p:txBody>
-      </p:sp>
-      <p:sp>
-        <p:nvSpPr>
-          <p:cNvPr id="38" name="p13-q-4">
-            <a:extLst xmlns:a="http://schemas.openxmlformats.org/drawingml/2006/main">
-              <a:ext uri="{FF2B5EF4-FFF2-40B4-BE49-F238E27FC236}">
-                <a16:creationId xmlns:a16="http://schemas.microsoft.com/office/drawing/2014/main" id="{A4336E8C-2997-4CD8-BC44-14FB61BE83CD}"/>
-              </a:ext>
-            </a:extLst>
-          </p:cNvPr>
-          <p:cNvSpPr>
-            <a:spLocks xmlns:a="http://schemas.openxmlformats.org/drawingml/2006/main" noGrp="1"/>
-          </p:cNvSpPr>
-          <p:nvPr/>
-        </p:nvSpPr>
-        <p:spPr>
-          <a:xfrm xmlns:a="http://schemas.openxmlformats.org/drawingml/2006/main">
-            <a:off x="8343900" y="4229100"/>
-            <a:ext cx="3048000" cy="400050"/>
-          </a:xfrm>
-          <a:prstGeom xmlns:a="http://schemas.openxmlformats.org/drawingml/2006/main" prst="rect">
-            <a:avLst/>
-          </a:prstGeom>
-          <a:solidFill xmlns:a="http://schemas.openxmlformats.org/drawingml/2006/main">
-            <a:srgbClr val="E8F0F6"/>
-          </a:solidFill>
-          <a:ln xmlns:a="http://schemas.openxmlformats.org/drawingml/2006/main" w="0">
-            <a:noFill/>
-            <a:prstDash val="solid"/>
-          </a:ln>
-        </p:spPr>
-        <p:txBody>
-          <a:bodyPr xmlns:a="http://schemas.openxmlformats.org/drawingml/2006/main" lIns="76200" tIns="38100" rIns="76200" bIns="38100" anchor="ctr"/>
-          <a:lstStyle xmlns:a="http://schemas.openxmlformats.org/drawingml/2006/main"/>
-          <a:p xmlns:a="http://schemas.openxmlformats.org/drawingml/2006/main">
-            <a:pPr algn="ctr">
-              <a:buNone/>
-              <a:defRPr sz="1350" b="1">
+            <a:srgbClr val="FAF0DD"/>
+          </a:solidFill>
+          <a:ln xmlns:a="http://schemas.openxmlformats.org/drawingml/2006/main" w="0">
+            <a:noFill/>
+            <a:prstDash val="solid"/>
+          </a:ln>
+        </p:spPr>
+        <p:txBody>
+          <a:bodyPr xmlns:a="http://schemas.openxmlformats.org/drawingml/2006/main" lIns="76200" tIns="38100" rIns="76200" bIns="38100" anchor="ctr"/>
+          <a:lstStyle xmlns:a="http://schemas.openxmlformats.org/drawingml/2006/main"/>
+          <a:p xmlns:a="http://schemas.openxmlformats.org/drawingml/2006/main">
+            <a:pPr algn="ctr">
+              <a:lnSpc>
+                <a:spcPct val="112000"/>
+              </a:lnSpc>
+              <a:buNone/>
+              <a:defRPr sz="1725" b="1">
+                <a:solidFill>
+                  <a:srgbClr val="A86C12"/>
+                </a:solidFill>
+              </a:defRPr>
+            </a:pPr>
+            <a:r>
+              <a:rPr sz="1725" b="1">
+                <a:solidFill>
+                  <a:srgbClr val="A86C12"/>
+                </a:solidFill>
+                <a:latin typeface="Microsoft YaHei"/>
+                <a:ea typeface="Microsoft YaHei"/>
+                <a:cs typeface="Microsoft YaHei"/>
+              </a:rPr>
+              <a:t>不可自动化</a:t>
+            </a:r>
+          </a:p>
+        </p:txBody>
+      </p:sp>
+      <p:sp>
+        <p:nvSpPr>
+          <p:cNvPr id="17" name="summary-16-detail-3">
+            <a:extLst xmlns:a="http://schemas.openxmlformats.org/drawingml/2006/main">
+              <a:ext uri="{FF2B5EF4-FFF2-40B4-BE49-F238E27FC236}">
+                <a16:creationId xmlns:a16="http://schemas.microsoft.com/office/drawing/2014/main" id="{4215A053-42E4-48FE-AC4A-F25C22170A21}"/>
+              </a:ext>
+            </a:extLst>
+          </p:cNvPr>
+          <p:cNvSpPr>
+            <a:spLocks xmlns:a="http://schemas.openxmlformats.org/drawingml/2006/main" noGrp="1"/>
+          </p:cNvSpPr>
+          <p:nvPr/>
+        </p:nvSpPr>
+        <p:spPr>
+          <a:xfrm xmlns:a="http://schemas.openxmlformats.org/drawingml/2006/main">
+            <a:off x="9201150" y="2095500"/>
+            <a:ext cx="2724150" cy="1676400"/>
+          </a:xfrm>
+          <a:prstGeom xmlns:a="http://schemas.openxmlformats.org/drawingml/2006/main" prst="roundRect">
+            <a:avLst>
+              <a:gd name="adj" fmla="val 4545"/>
+            </a:avLst>
+          </a:prstGeom>
+          <a:solidFill xmlns:a="http://schemas.openxmlformats.org/drawingml/2006/main">
+            <a:srgbClr val="FFFFFF"/>
+          </a:solidFill>
+          <a:ln xmlns:a="http://schemas.openxmlformats.org/drawingml/2006/main" w="9525">
+            <a:solidFill>
+              <a:srgbClr val="D6DDE2"/>
+            </a:solidFill>
+            <a:prstDash val="solid"/>
+          </a:ln>
+        </p:spPr>
+        <p:txBody>
+          <a:bodyPr xmlns:a="http://schemas.openxmlformats.org/drawingml/2006/main" lIns="76200" tIns="38100" rIns="76200" bIns="38100" anchor="ctr"/>
+          <a:lstStyle xmlns:a="http://schemas.openxmlformats.org/drawingml/2006/main"/>
+          <a:p xmlns:a="http://schemas.openxmlformats.org/drawingml/2006/main">
+            <a:pPr algn="ctr">
+              <a:lnSpc>
+                <a:spcPct val="116000"/>
+              </a:lnSpc>
+              <a:buNone/>
+              <a:defRPr sz="1500" b="1">
                 <a:solidFill>
                   <a:srgbClr val="263746"/>
                 </a:solidFill>
               </a:defRPr>
             </a:pPr>
             <a:r>
-              <a:rPr sz="1350" b="1">
+              <a:rPr sz="1500" b="1">
                 <a:solidFill>
                   <a:srgbClr val="263746"/>
                 </a:solidFill>
@@ -18256,44 +17036,51 @@
                 <a:ea typeface="Microsoft YaHei"/>
                 <a:cs typeface="Microsoft YaHei"/>
               </a:rPr>
-              <a:t>核验、取舍、担责</a:t>
-            </a:r>
-          </a:p>
-        </p:txBody>
-      </p:sp>
-      <p:sp>
-        <p:nvSpPr>
-          <p:cNvPr id="39" name="p13-bottom">
-            <a:extLst xmlns:a="http://schemas.openxmlformats.org/drawingml/2006/main">
-              <a:ext uri="{FF2B5EF4-FFF2-40B4-BE49-F238E27FC236}">
-                <a16:creationId xmlns:a16="http://schemas.microsoft.com/office/drawing/2014/main" id="{449E0D47-6D62-43FB-B9E8-38061C129758}"/>
-              </a:ext>
-            </a:extLst>
-          </p:cNvPr>
-          <p:cNvSpPr>
-            <a:spLocks xmlns:a="http://schemas.openxmlformats.org/drawingml/2006/main" noGrp="1"/>
-          </p:cNvSpPr>
-          <p:nvPr/>
-        </p:nvSpPr>
-        <p:spPr>
-          <a:xfrm xmlns:a="http://schemas.openxmlformats.org/drawingml/2006/main">
-            <a:off x="2190750" y="5219700"/>
-            <a:ext cx="7810500" cy="400050"/>
-          </a:xfrm>
-          <a:prstGeom xmlns:a="http://schemas.openxmlformats.org/drawingml/2006/main" prst="rect">
-            <a:avLst/>
-          </a:prstGeom>
-          <a:noFill xmlns:a="http://schemas.openxmlformats.org/drawingml/2006/main"/>
-          <a:ln xmlns:a="http://schemas.openxmlformats.org/drawingml/2006/main" w="0">
-            <a:noFill/>
-            <a:prstDash val="solid"/>
-          </a:ln>
-        </p:spPr>
-        <p:txBody>
-          <a:bodyPr xmlns:a="http://schemas.openxmlformats.org/drawingml/2006/main" lIns="76200" tIns="38100" rIns="76200" bIns="38100" anchor="ctr"/>
-          <a:lstStyle xmlns:a="http://schemas.openxmlformats.org/drawingml/2006/main"/>
-          <a:p xmlns:a="http://schemas.openxmlformats.org/drawingml/2006/main">
-            <a:pPr algn="ctr">
+              <a:t>研究价值、伦理取舍、证据充分性与最终责任由人承担</a:t>
+            </a:r>
+          </a:p>
+        </p:txBody>
+      </p:sp>
+      <p:sp>
+        <p:nvSpPr>
+          <p:cNvPr id="18" name="summary-16-boundary">
+            <a:extLst xmlns:a="http://schemas.openxmlformats.org/drawingml/2006/main">
+              <a:ext uri="{FF2B5EF4-FFF2-40B4-BE49-F238E27FC236}">
+                <a16:creationId xmlns:a16="http://schemas.microsoft.com/office/drawing/2014/main" id="{E96D0B64-C2CC-40F8-B537-AC52DD162E6D}"/>
+              </a:ext>
+            </a:extLst>
+          </p:cNvPr>
+          <p:cNvSpPr>
+            <a:spLocks xmlns:a="http://schemas.openxmlformats.org/drawingml/2006/main" noGrp="1"/>
+          </p:cNvSpPr>
+          <p:nvPr/>
+        </p:nvSpPr>
+        <p:spPr>
+          <a:xfrm xmlns:a="http://schemas.openxmlformats.org/drawingml/2006/main">
+            <a:off x="1162050" y="4400550"/>
+            <a:ext cx="9867900" cy="876300"/>
+          </a:xfrm>
+          <a:prstGeom xmlns:a="http://schemas.openxmlformats.org/drawingml/2006/main" prst="roundRect">
+            <a:avLst>
+              <a:gd name="adj" fmla="val 8696"/>
+            </a:avLst>
+          </a:prstGeom>
+          <a:solidFill xmlns:a="http://schemas.openxmlformats.org/drawingml/2006/main">
+            <a:srgbClr val="F8E9EA"/>
+          </a:solidFill>
+          <a:ln xmlns:a="http://schemas.openxmlformats.org/drawingml/2006/main" w="0">
+            <a:noFill/>
+            <a:prstDash val="solid"/>
+          </a:ln>
+        </p:spPr>
+        <p:txBody>
+          <a:bodyPr xmlns:a="http://schemas.openxmlformats.org/drawingml/2006/main" lIns="76200" tIns="38100" rIns="76200" bIns="38100" anchor="ctr"/>
+          <a:lstStyle xmlns:a="http://schemas.openxmlformats.org/drawingml/2006/main"/>
+          <a:p xmlns:a="http://schemas.openxmlformats.org/drawingml/2006/main">
+            <a:pPr algn="ctr">
+              <a:lnSpc>
+                <a:spcPct val="114000"/>
+              </a:lnSpc>
               <a:buNone/>
               <a:defRPr sz="1725" b="1">
                 <a:solidFill>
@@ -18310,7 +17097,7 @@
                 <a:ea typeface="Microsoft YaHei"/>
                 <a:cs typeface="Microsoft YaHei"/>
               </a:rPr>
-              <a:t>记录 AI 参与和核验；效率提升不改变证据标准。</a:t>
+              <a:t>关键边界：AI 可以扩展研究能力，但不能代替研究者承担论证、伦理与公开提交责任。</a:t>
             </a:r>
           </a:p>
         </p:txBody>
